--- a/downloads/DCT_V2_Ch11_Slides.pptx
+++ b/downloads/DCT_V2_Ch11_Slides.pptx
@@ -27,9 +27,10 @@
     <p:sldId id="275" r:id="rId21"/>
     <p:sldId id="276" r:id="rId22"/>
     <p:sldId id="277" r:id="rId23"/>
+    <p:sldId id="278" r:id="rId24"/>
   </p:sldIdLst>
   <p:notesMasterIdLst>
-    <p:notesMasterId r:id="rId24"/>
+    <p:notesMasterId r:id="rId25"/>
   </p:notesMasterIdLst>
   <p:sldSz cx="12192000" cy="6858000"/>
   <p:notesSz cx="6858000" cy="12192000"/>
@@ -128,7 +129,7 @@
   <p:extLst>
     <p:ext uri="{521415D9-36F7-43E2-AB2F-B90AF26B5E84}">
       <p14:sectionLst xmlns:p14="http://schemas.microsoft.com/office/powerpoint/2010/main">
-        <p14:section name="Opening" id="{986b2a7a-5c19-9da8-475e-ffbc10aba0e3}">
+        <p14:section name="Opening" id="{cab71b3c-985c-9cc9-ab7c-766ef2942dd5}">
           <p14:sldIdLst>
             <p14:sldId id="256"/>
             <p14:sldId id="257"/>
@@ -136,36 +137,36 @@
             <p14:sldId id="259"/>
           </p14:sldIdLst>
         </p14:section>
-        <p14:section name="11.1 From a Law and a Set to a Family" id="{a0932437-1054-799a-4f78-8f18ce1c3414}">
+        <p14:section name="11.1 From a Law and a Set to a Family" id="{1ae99c28-01d5-429e-d61f-1bd951c394e2}">
           <p14:sldIdLst>
             <p14:sldId id="260"/>
             <p14:sldId id="261"/>
           </p14:sldIdLst>
         </p14:section>
-        <p14:section name="11.2 Divergence Families" id="{f736889b-a8ef-ca4e-5e67-565cd4e69341}">
+        <p14:section name="11.2 Divergence Families" id="{21f0532e-6068-14d5-4572-afa7e25eaf65}">
           <p14:sldIdLst>
             <p14:sldId id="262"/>
             <p14:sldId id="263"/>
           </p14:sldIdLst>
         </p14:section>
-        <p14:section name="11.3 Wasserstein Families on a Record" id="{b9eff208-2c53-f40e-0bdf-5dc9460e9dea}">
+        <p14:section name="11.3 Wasserstein Families on a Record" id="{3b5f9e3d-f144-6b7c-e9ee-4e785bf0d46f}">
           <p14:sldIdLst>
             <p14:sldId id="264"/>
             <p14:sldId id="265"/>
           </p14:sldIdLst>
         </p14:section>
-        <p14:section name="11.4 Moment Families" id="{34fefa09-dc43-0387-e4d3-b48dff3d4ad9}">
+        <p14:section name="11.4 Moment Families" id="{2111fe57-01b5-7470-c93e-6691cffd2771}">
           <p14:sldIdLst>
             <p14:sldId id="266"/>
           </p14:sldIdLst>
         </p14:section>
-        <p14:section name="11.5 Records, Confidence, and Time" id="{0700ce6f-9556-6c1a-48d6-b646d469c60c}">
+        <p14:section name="11.5 Records, Confidence, and Time" id="{93475513-655f-8d81-73a3-f1b71ea75d5e}">
           <p14:sldIdLst>
             <p14:sldId id="267"/>
             <p14:sldId id="268"/>
           </p14:sldIdLst>
         </p14:section>
-        <p14:section name="Worked Example 11.1" id="{3cbdc1ef-33be-ed64-e3f3-c34b9e13bc66}">
+        <p14:section name="Worked Example 11.1" id="{1a44d27d-05f6-5a55-2abf-18726f920a14}">
           <p14:sldIdLst>
             <p14:sldId id="269"/>
             <p14:sldId id="270"/>
@@ -174,16 +175,21 @@
             <p14:sldId id="273"/>
           </p14:sldIdLst>
         </p14:section>
-        <p14:section name="AXIOM Lab 2.11" id="{e0d4540d-e039-4280-6d2a-1bc7b3a455c0}">
+        <p14:section name="In Practice" id="{f3bc518e-dc92-5be3-0d66-75fb880a3b33}">
           <p14:sldIdLst>
             <p14:sldId id="274"/>
           </p14:sldIdLst>
         </p14:section>
-        <p14:section name="Close" id="{cf0233c6-f511-d420-c8d8-f1222a2ce016}">
+        <p14:section name="AXIOM Lab 2.11" id="{58bf9355-6272-bc22-0670-ec66d1a38702}">
           <p14:sldIdLst>
             <p14:sldId id="275"/>
+          </p14:sldIdLst>
+        </p14:section>
+        <p14:section name="Close" id="{522a2b94-0707-dbd0-ec7d-5e7dd3c5f58c}">
+          <p14:sldIdLst>
             <p14:sldId id="276"/>
             <p14:sldId id="277"/>
+            <p14:sldId id="278"/>
           </p14:sldIdLst>
         </p14:section>
       </p14:sectionLst>
@@ -1470,7 +1476,7 @@
           <a:p>
             <a:r>
               <a:rPr lang="en-US" dirty="0"/>
-              <a:t>AXIOM Lab 2.11. What to look for: a chance that moves little with the rate of closures and much with the spread; balls whose radii hold the doubts but whose appetites no package can meet; radii that buy reliability on small records at about the price of a margin; a moment bound that fears a lump.</a:t>
+              <a:t>In Practice, Chapter 11: Seven States Plan for Four Colorado Rivers. A real organization's decision of this chapter's kind, told from its published record; every figure is cited in the book. The lesson for Meridian: Declare the family of laws the records allow, and judge every option under every law in it. Sources: U.S. Bureau of Reclamation (2012), Colorado River Basin Study, Executive Summary; Groves et al. (2013), RAND.</a:t>
             </a:r>
             <a:endParaRPr lang="en-US" dirty="0"/>
           </a:p>
@@ -1646,7 +1652,7 @@
           <a:p>
             <a:r>
               <a:rPr lang="en-US" dirty="0"/>
-              <a:t>Key Takeaways, Chapter 11.</a:t>
+              <a:t>AXIOM Lab 2.11. What to look for: a chance that moves little with the rate of closures and much with the spread; balls whose radii hold the doubts but whose appetites no package can meet; radii that buy reliability on small records at about the price of a margin; a moment bound that fears a lump.</a:t>
             </a:r>
             <a:endParaRPr lang="en-US" dirty="0"/>
           </a:p>
@@ -1734,7 +1740,7 @@
           <a:p>
             <a:r>
               <a:rPr lang="en-US" dirty="0"/>
-              <a:t>The notebook and workbook are on the course website, www.dynamiccorporatetransformation.com.</a:t>
+              <a:t>Key Takeaways, Chapter 11.</a:t>
             </a:r>
             <a:endParaRPr lang="en-US" dirty="0"/>
           </a:p>
@@ -1822,7 +1828,7 @@
           <a:p>
             <a:r>
               <a:rPr lang="en-US" dirty="0"/>
-              <a:t>Chapter 12 opens Part IV, Multi-Objective and Intelligent Enterprise Optimization: Pareto optimality, frontiers, scalarizations, and trade-offs read as frontier slopes and shadow prices.</a:t>
+              <a:t>The notebook and workbook are on the course website, www.dynamiccorporatetransformation.com.</a:t>
             </a:r>
             <a:endParaRPr lang="en-US" dirty="0"/>
           </a:p>
@@ -1846,6 +1852,94 @@
             <a:fld id="{F7021451-1387-4CA6-816F-3879F97B5CBC}" type="slidenum">
               <a:rPr lang="en-US"/>
               <a:t>22</a:t>
+            </a:fld>
+            <a:endParaRPr lang="en-US"/>
+          </a:p>
+        </p:txBody>
+      </p:sp>
+    </p:spTree>
+    <p:extLst>
+      <p:ext uri="{BB962C8B-B14F-4D97-AF65-F5344CB8AC3E}">
+        <p14:creationId xmlns:p14="http://schemas.microsoft.com/office/powerpoint/2010/main" val="1024086991"/>
+      </p:ext>
+    </p:extLst>
+  </p:cSld>
+  <p:clrMapOvr>
+    <a:masterClrMapping/>
+  </p:clrMapOvr>
+</p:notes>
+</file>
+
+<file path=ppt/notesSlides/notesSlide23.xml><?xml version="1.0" encoding="utf-8"?>
+<p:notes xmlns:a="http://schemas.openxmlformats.org/drawingml/2006/main" xmlns:r="http://schemas.openxmlformats.org/officeDocument/2006/relationships" xmlns:p="http://schemas.openxmlformats.org/presentationml/2006/main">
+  <p:cSld>
+    <p:spTree>
+      <p:nvGrpSpPr>
+        <p:cNvPr id="1" name=""/>
+        <p:cNvGrpSpPr/>
+        <p:nvPr/>
+      </p:nvGrpSpPr>
+      <p:grpSpPr>
+        <a:xfrm>
+          <a:off x="0" y="0"/>
+          <a:ext cx="0" cy="0"/>
+          <a:chOff x="0" y="0"/>
+          <a:chExt cx="0" cy="0"/>
+        </a:xfrm>
+      </p:grpSpPr>
+      <p:sp>
+        <p:nvSpPr>
+          <p:cNvPr id="2" name="Slide Image Placeholder 1"/>
+          <p:cNvSpPr>
+            <a:spLocks noGrp="1" noRot="1" noChangeAspect="1"/>
+          </p:cNvSpPr>
+          <p:nvPr>
+            <p:ph type="sldImg"/>
+          </p:nvPr>
+        </p:nvSpPr>
+        <p:spPr/>
+      </p:sp>
+      <p:sp>
+        <p:nvSpPr>
+          <p:cNvPr id="3" name="Notes Placeholder 2"/>
+          <p:cNvSpPr>
+            <a:spLocks noGrp="1"/>
+          </p:cNvSpPr>
+          <p:nvPr>
+            <p:ph type="body" idx="1"/>
+          </p:nvPr>
+        </p:nvSpPr>
+        <p:spPr/>
+        <p:txBody>
+          <a:bodyPr/>
+          <a:lstStyle/>
+          <a:p>
+            <a:r>
+              <a:rPr lang="en-US" dirty="0"/>
+              <a:t>Chapter 12 opens Part IV, Multi-Objective and Intelligent Enterprise Optimization: Pareto optimality, frontiers, scalarizations, and trade-offs read as frontier slopes and shadow prices.</a:t>
+            </a:r>
+            <a:endParaRPr lang="en-US" dirty="0"/>
+          </a:p>
+        </p:txBody>
+      </p:sp>
+      <p:sp>
+        <p:nvSpPr>
+          <p:cNvPr id="4" name="Slide Number Placeholder 3"/>
+          <p:cNvSpPr>
+            <a:spLocks noGrp="1"/>
+          </p:cNvSpPr>
+          <p:nvPr>
+            <p:ph type="sldNum" sz="quarter" idx="10"/>
+          </p:nvPr>
+        </p:nvSpPr>
+        <p:spPr/>
+        <p:txBody>
+          <a:bodyPr/>
+          <a:lstStyle/>
+          <a:p>
+            <a:fld id="{F7021451-1387-4CA6-816F-3879F97B5CBC}" type="slidenum">
+              <a:rPr lang="en-US"/>
+              <a:t>23</a:t>
             </a:fld>
             <a:endParaRPr lang="en-US"/>
           </a:p>
@@ -14072,7 +14166,7 @@
                   <a:schemeClr val="accent1"/>
                 </a:solidFill>
               </a:rPr>
-              <a:t>AXIOM LAB 2.11 · MODULE AXIOM-11</a:t>
+              <a:t>IN PRACTICE · COLORADO RIVER BASIN STUDY</a:t>
             </a:r>
             <a:endParaRPr lang="en-US" sz="1200" dirty="0"/>
           </a:p>
@@ -14113,804 +14207,26 @@
                 <a:ea typeface="Cambria" pitchFamily="34" charset="-122"/>
                 <a:cs typeface="Cambria" pitchFamily="34" charset="-120"/>
               </a:rPr>
-              <a:t>Records, families and balls, in AXIOM</a:t>
+              <a:t>Seven states plan for four Colorado Rivers</a:t>
             </a:r>
             <a:endParaRPr lang="en-US" sz="3200" dirty="0"/>
           </a:p>
         </p:txBody>
       </p:sp>
-      <p:pic>
-        <p:nvPicPr>
-          <p:cNvPr id="5" name="AXIOM logo" descr="AXIOM">    </p:cNvPr>
-          <p:cNvPicPr>
-            <a:picLocks noChangeAspect="1"/>
-          </p:cNvPicPr>
-          <p:nvPr/>
-        </p:nvPicPr>
-        <p:blipFill>
-          <a:blip r:embed="rId1"/>
-          <a:stretch>
-            <a:fillRect/>
-          </a:stretch>
-        </p:blipFill>
-        <p:spPr>
-          <a:xfrm>
-            <a:off x="9539935" y="310896"/>
-            <a:ext cx="2103120" cy="420624"/>
-          </a:xfrm>
-          <a:prstGeom prst="rect">
-            <a:avLst/>
-          </a:prstGeom>
-        </p:spPr>
-      </p:pic>
-      <p:sp>
-        <p:nvSpPr>
-          <p:cNvPr id="6" name="Situation"/>
-          <p:cNvSpPr txBox="1"/>
-          <p:nvPr/>
-        </p:nvSpPr>
-        <p:spPr>
-          <a:xfrm>
-            <a:off x="548640" y="1645920"/>
-            <a:ext cx="11094415" cy="777240"/>
-          </a:xfrm>
-          <a:prstGeom prst="rect">
-            <a:avLst/>
-          </a:prstGeom>
-          <a:noFill/>
-          <a:ln/>
-        </p:spPr>
-        <p:txBody>
-          <a:bodyPr wrap="square" lIns="0" tIns="0" rIns="0" bIns="0" rtlCol="0" anchor="t"/>
-          <a:lstStyle/>
-          <a:p>
-            <a:pPr indent="0" marL="0">
-              <a:buNone/>
-            </a:pPr>
-            <a:r>
-              <a:rPr lang="en-US" sz="1500" dirty="0">
-                <a:solidFill>
-                  <a:schemeClr val="tx1"/>
-                </a:solidFill>
-              </a:rPr>
-              <a:t>The audit committee accepts Chapter 9's law as the offices' best estimate, but not as a fact. Open AXIOM, choose Lab 2.11 and load the Meridian ambiguity instance: Chapter 9's law and levers, the treasury's count of closures and the engineering office's record of deviations.</a:t>
-            </a:r>
-            <a:endParaRPr lang="en-US" sz="1500" dirty="0"/>
-          </a:p>
-        </p:txBody>
-      </p:sp>
-      <p:sp>
-        <p:nvSpPr>
-          <p:cNvPr id="7" name="Flow line"/>
+      <p:sp>
+        <p:nvSpPr>
+          <p:cNvPr id="5" name="Card"/>
           <p:cNvSpPr/>
           <p:nvPr/>
         </p:nvSpPr>
         <p:spPr>
           <a:xfrm>
-            <a:off x="1658082" y="2880360"/>
-            <a:ext cx="8875532" cy="0"/>
-          </a:xfrm>
-          <a:prstGeom prst="line">
-            <a:avLst/>
-          </a:prstGeom>
-          <a:noFill/>
-          <a:ln w="25400">
-            <a:solidFill>
-              <a:srgbClr val="C4CBD8"/>
-            </a:solidFill>
-            <a:prstDash val="solid"/>
-          </a:ln>
-        </p:spPr>
-      </p:sp>
-      <p:sp>
-        <p:nvSpPr>
-          <p:cNvPr id="8" name="Number"/>
-          <p:cNvSpPr/>
-          <p:nvPr/>
-        </p:nvSpPr>
-        <p:spPr>
-          <a:xfrm>
-            <a:off x="1383762" y="2606040"/>
-            <a:ext cx="548640" cy="548640"/>
-          </a:xfrm>
-          <a:prstGeom prst="ellipse">
-            <a:avLst/>
-          </a:prstGeom>
-          <a:solidFill>
-            <a:schemeClr val="accent1"/>
-          </a:solidFill>
-          <a:ln w="6350">
-            <a:solidFill>
-              <a:schemeClr val="accent1"/>
-            </a:solidFill>
-            <a:prstDash val="solid"/>
-          </a:ln>
-        </p:spPr>
-      </p:sp>
-      <p:sp>
-        <p:nvSpPr>
-          <p:cNvPr id="9" name="Text 5"/>
-          <p:cNvSpPr txBox="1"/>
-          <p:nvPr/>
-        </p:nvSpPr>
-        <p:spPr>
-          <a:xfrm>
-            <a:off x="1383762" y="2606040"/>
-            <a:ext cx="548640" cy="548640"/>
-          </a:xfrm>
-          <a:prstGeom prst="rect">
-            <a:avLst/>
-          </a:prstGeom>
-          <a:noFill/>
-          <a:ln/>
-        </p:spPr>
-        <p:txBody>
-          <a:bodyPr wrap="square" lIns="0" tIns="0" rIns="0" bIns="0" rtlCol="0" anchor="ctr"/>
-          <a:lstStyle/>
-          <a:p>
-            <a:pPr algn="ctr" indent="0" marL="0">
-              <a:buNone/>
-            </a:pPr>
-            <a:r>
-              <a:rPr lang="en-US" sz="1600" b="1" dirty="0">
-                <a:solidFill>
-                  <a:schemeClr val="bg1"/>
-                </a:solidFill>
-                <a:latin typeface="Calibri" pitchFamily="34" charset="0"/>
-                <a:ea typeface="Calibri" pitchFamily="34" charset="-122"/>
-                <a:cs typeface="Calibri" pitchFamily="34" charset="-120"/>
-              </a:rPr>
-              <a:t>1</a:t>
-            </a:r>
-            <a:endParaRPr lang="en-US" sz="1600" dirty="0"/>
-          </a:p>
-        </p:txBody>
-      </p:sp>
-      <p:sp>
-        <p:nvSpPr>
-          <p:cNvPr id="10" name="Flow head"/>
-          <p:cNvSpPr txBox="1"/>
-          <p:nvPr/>
-        </p:nvSpPr>
-        <p:spPr>
-          <a:xfrm>
-            <a:off x="621792" y="3291840"/>
-            <a:ext cx="2072579" cy="548640"/>
-          </a:xfrm>
-          <a:prstGeom prst="rect">
-            <a:avLst/>
-          </a:prstGeom>
-          <a:noFill/>
-          <a:ln/>
-        </p:spPr>
-        <p:txBody>
-          <a:bodyPr wrap="square" lIns="0" tIns="0" rIns="0" bIns="0" rtlCol="0" anchor="t"/>
-          <a:lstStyle/>
-          <a:p>
-            <a:pPr algn="ctr" indent="0" marL="0">
-              <a:buNone/>
-            </a:pPr>
-            <a:r>
-              <a:rPr lang="en-US" sz="1600" b="1" dirty="0">
-                <a:solidFill>
-                  <a:schemeClr val="tx1"/>
-                </a:solidFill>
-                <a:latin typeface="Cambria" pitchFamily="34" charset="0"/>
-                <a:ea typeface="Cambria" pitchFamily="34" charset="-122"/>
-                <a:cs typeface="Cambria" pitchFamily="34" charset="-120"/>
-              </a:rPr>
-              <a:t>Read the records</a:t>
-            </a:r>
-            <a:endParaRPr lang="en-US" sz="1600" dirty="0"/>
-          </a:p>
-        </p:txBody>
-      </p:sp>
-      <p:sp>
-        <p:nvSpPr>
-          <p:cNvPr id="11" name="Flow text"/>
-          <p:cNvSpPr txBox="1"/>
-          <p:nvPr/>
-        </p:nvSpPr>
-        <p:spPr>
-          <a:xfrm>
-            <a:off x="640080" y="3867912"/>
-            <a:ext cx="2036003" cy="1554480"/>
-          </a:xfrm>
-          <a:prstGeom prst="rect">
-            <a:avLst/>
-          </a:prstGeom>
-          <a:noFill/>
-          <a:ln/>
-        </p:spPr>
-        <p:txBody>
-          <a:bodyPr wrap="square" lIns="0" tIns="0" rIns="0" bIns="0" rtlCol="0" anchor="t"/>
-          <a:lstStyle/>
-          <a:p>
-            <a:pPr algn="ctr" indent="0" marL="0">
-              <a:buNone/>
-            </a:pPr>
-            <a:r>
-              <a:rPr lang="en-US" sz="1400" dirty="0">
-                <a:solidFill>
-                  <a:schemeClr val="tx2"/>
-                </a:solidFill>
-              </a:rPr>
-              <a:t>Confidence bounds for the rate and the spread; sweep each across its range.</a:t>
-            </a:r>
-            <a:endParaRPr lang="en-US" sz="1400" dirty="0"/>
-          </a:p>
-        </p:txBody>
-      </p:sp>
-      <p:sp>
-        <p:nvSpPr>
-          <p:cNvPr id="12" name="Number"/>
-          <p:cNvSpPr/>
-          <p:nvPr/>
-        </p:nvSpPr>
-        <p:spPr>
-          <a:xfrm>
-            <a:off x="3602645" y="2606040"/>
-            <a:ext cx="548640" cy="548640"/>
-          </a:xfrm>
-          <a:prstGeom prst="ellipse">
-            <a:avLst/>
-          </a:prstGeom>
-          <a:solidFill>
-            <a:schemeClr val="accent1"/>
-          </a:solidFill>
-          <a:ln w="6350">
-            <a:solidFill>
-              <a:schemeClr val="accent1"/>
-            </a:solidFill>
-            <a:prstDash val="solid"/>
-          </a:ln>
-        </p:spPr>
-      </p:sp>
-      <p:sp>
-        <p:nvSpPr>
-          <p:cNvPr id="13" name="Text 9"/>
-          <p:cNvSpPr txBox="1"/>
-          <p:nvPr/>
-        </p:nvSpPr>
-        <p:spPr>
-          <a:xfrm>
-            <a:off x="3602645" y="2606040"/>
-            <a:ext cx="548640" cy="548640"/>
-          </a:xfrm>
-          <a:prstGeom prst="rect">
-            <a:avLst/>
-          </a:prstGeom>
-          <a:noFill/>
-          <a:ln/>
-        </p:spPr>
-        <p:txBody>
-          <a:bodyPr wrap="square" lIns="0" tIns="0" rIns="0" bIns="0" rtlCol="0" anchor="ctr"/>
-          <a:lstStyle/>
-          <a:p>
-            <a:pPr algn="ctr" indent="0" marL="0">
-              <a:buNone/>
-            </a:pPr>
-            <a:r>
-              <a:rPr lang="en-US" sz="1600" b="1" dirty="0">
-                <a:solidFill>
-                  <a:schemeClr val="bg1"/>
-                </a:solidFill>
-                <a:latin typeface="Calibri" pitchFamily="34" charset="0"/>
-                <a:ea typeface="Calibri" pitchFamily="34" charset="-122"/>
-                <a:cs typeface="Calibri" pitchFamily="34" charset="-120"/>
-              </a:rPr>
-              <a:t>2</a:t>
-            </a:r>
-            <a:endParaRPr lang="en-US" sz="1600" dirty="0"/>
-          </a:p>
-        </p:txBody>
-      </p:sp>
-      <p:sp>
-        <p:nvSpPr>
-          <p:cNvPr id="14" name="Flow head"/>
-          <p:cNvSpPr txBox="1"/>
-          <p:nvPr/>
-        </p:nvSpPr>
-        <p:spPr>
-          <a:xfrm>
-            <a:off x="2840675" y="3291840"/>
-            <a:ext cx="2072579" cy="548640"/>
-          </a:xfrm>
-          <a:prstGeom prst="rect">
-            <a:avLst/>
-          </a:prstGeom>
-          <a:noFill/>
-          <a:ln/>
-        </p:spPr>
-        <p:txBody>
-          <a:bodyPr wrap="square" lIns="0" tIns="0" rIns="0" bIns="0" rtlCol="0" anchor="t"/>
-          <a:lstStyle/>
-          <a:p>
-            <a:pPr algn="ctr" indent="0" marL="0">
-              <a:buNone/>
-            </a:pPr>
-            <a:r>
-              <a:rPr lang="en-US" sz="1600" b="1" dirty="0">
-                <a:solidFill>
-                  <a:schemeClr val="tx1"/>
-                </a:solidFill>
-                <a:latin typeface="Cambria" pitchFamily="34" charset="0"/>
-                <a:ea typeface="Cambria" pitchFamily="34" charset="-122"/>
-                <a:cs typeface="Cambria" pitchFamily="34" charset="-120"/>
-              </a:rPr>
-              <a:t>Price the family</a:t>
-            </a:r>
-            <a:endParaRPr lang="en-US" sz="1600" dirty="0"/>
-          </a:p>
-        </p:txBody>
-      </p:sp>
-      <p:sp>
-        <p:nvSpPr>
-          <p:cNvPr id="15" name="Flow text"/>
-          <p:cNvSpPr txBox="1"/>
-          <p:nvPr/>
-        </p:nvSpPr>
-        <p:spPr>
-          <a:xfrm>
-            <a:off x="2858963" y="3867912"/>
-            <a:ext cx="2036003" cy="1554480"/>
-          </a:xfrm>
-          <a:prstGeom prst="rect">
-            <a:avLst/>
-          </a:prstGeom>
-          <a:noFill/>
-          <a:ln/>
-        </p:spPr>
-        <p:txBody>
-          <a:bodyPr wrap="square" lIns="0" tIns="0" rIns="0" bIns="0" rtlCol="0" anchor="t"/>
-          <a:lstStyle/>
-          <a:p>
-            <a:pPr algn="ctr" indent="0" marL="0">
-              <a:buNone/>
-            </a:pPr>
-            <a:r>
-              <a:rPr lang="en-US" sz="1400" dirty="0">
-                <a:solidFill>
-                  <a:schemeClr val="tx2"/>
-                </a:solidFill>
-              </a:rPr>
-              <a:t>Its worst law, the cheapest package there, checked on fresh paths.</a:t>
-            </a:r>
-            <a:endParaRPr lang="en-US" sz="1400" dirty="0"/>
-          </a:p>
-        </p:txBody>
-      </p:sp>
-      <p:sp>
-        <p:nvSpPr>
-          <p:cNvPr id="16" name="Number"/>
-          <p:cNvSpPr/>
-          <p:nvPr/>
-        </p:nvSpPr>
-        <p:spPr>
-          <a:xfrm>
-            <a:off x="5821528" y="2606040"/>
-            <a:ext cx="548640" cy="548640"/>
-          </a:xfrm>
-          <a:prstGeom prst="ellipse">
-            <a:avLst/>
-          </a:prstGeom>
-          <a:solidFill>
-            <a:schemeClr val="accent1"/>
-          </a:solidFill>
-          <a:ln w="6350">
-            <a:solidFill>
-              <a:schemeClr val="accent1"/>
-            </a:solidFill>
-            <a:prstDash val="solid"/>
-          </a:ln>
-        </p:spPr>
-      </p:sp>
-      <p:sp>
-        <p:nvSpPr>
-          <p:cNvPr id="17" name="Text 13"/>
-          <p:cNvSpPr txBox="1"/>
-          <p:nvPr/>
-        </p:nvSpPr>
-        <p:spPr>
-          <a:xfrm>
-            <a:off x="5821528" y="2606040"/>
-            <a:ext cx="548640" cy="548640"/>
-          </a:xfrm>
-          <a:prstGeom prst="rect">
-            <a:avLst/>
-          </a:prstGeom>
-          <a:noFill/>
-          <a:ln/>
-        </p:spPr>
-        <p:txBody>
-          <a:bodyPr wrap="square" lIns="0" tIns="0" rIns="0" bIns="0" rtlCol="0" anchor="ctr"/>
-          <a:lstStyle/>
-          <a:p>
-            <a:pPr algn="ctr" indent="0" marL="0">
-              <a:buNone/>
-            </a:pPr>
-            <a:r>
-              <a:rPr lang="en-US" sz="1600" b="1" dirty="0">
-                <a:solidFill>
-                  <a:schemeClr val="bg1"/>
-                </a:solidFill>
-                <a:latin typeface="Calibri" pitchFamily="34" charset="0"/>
-                <a:ea typeface="Calibri" pitchFamily="34" charset="-122"/>
-                <a:cs typeface="Calibri" pitchFamily="34" charset="-120"/>
-              </a:rPr>
-              <a:t>3</a:t>
-            </a:r>
-            <a:endParaRPr lang="en-US" sz="1600" dirty="0"/>
-          </a:p>
-        </p:txBody>
-      </p:sp>
-      <p:sp>
-        <p:nvSpPr>
-          <p:cNvPr id="18" name="Flow head"/>
-          <p:cNvSpPr txBox="1"/>
-          <p:nvPr/>
-        </p:nvSpPr>
-        <p:spPr>
-          <a:xfrm>
-            <a:off x="5059558" y="3291840"/>
-            <a:ext cx="2072579" cy="548640"/>
-          </a:xfrm>
-          <a:prstGeom prst="rect">
-            <a:avLst/>
-          </a:prstGeom>
-          <a:noFill/>
-          <a:ln/>
-        </p:spPr>
-        <p:txBody>
-          <a:bodyPr wrap="square" lIns="0" tIns="0" rIns="0" bIns="0" rtlCol="0" anchor="t"/>
-          <a:lstStyle/>
-          <a:p>
-            <a:pPr algn="ctr" indent="0" marL="0">
-              <a:buNone/>
-            </a:pPr>
-            <a:r>
-              <a:rPr lang="en-US" sz="1600" b="1" dirty="0">
-                <a:solidFill>
-                  <a:schemeClr val="tx1"/>
-                </a:solidFill>
-                <a:latin typeface="Cambria" pitchFamily="34" charset="0"/>
-                <a:ea typeface="Cambria" pitchFamily="34" charset="-122"/>
-                <a:cs typeface="Cambria" pitchFamily="34" charset="-120"/>
-              </a:rPr>
-              <a:t>Try balls</a:t>
-            </a:r>
-            <a:endParaRPr lang="en-US" sz="1600" dirty="0"/>
-          </a:p>
-        </p:txBody>
-      </p:sp>
-      <p:sp>
-        <p:nvSpPr>
-          <p:cNvPr id="19" name="Flow text"/>
-          <p:cNvSpPr txBox="1"/>
-          <p:nvPr/>
-        </p:nvSpPr>
-        <p:spPr>
-          <a:xfrm>
-            <a:off x="5077846" y="3867912"/>
-            <a:ext cx="2036003" cy="1554480"/>
-          </a:xfrm>
-          <a:prstGeom prst="rect">
-            <a:avLst/>
-          </a:prstGeom>
-          <a:noFill/>
-          <a:ln/>
-        </p:spPr>
-        <p:txBody>
-          <a:bodyPr wrap="square" lIns="0" tIns="0" rIns="0" bIns="0" rtlCol="0" anchor="t"/>
-          <a:lstStyle/>
-          <a:p>
-            <a:pPr algn="ctr" indent="0" marL="0">
-              <a:buNone/>
-            </a:pPr>
-            <a:r>
-              <a:rPr lang="en-US" sz="1400" dirty="0">
-                <a:solidFill>
-                  <a:schemeClr val="tx2"/>
-                </a:solidFill>
-              </a:rPr>
-              <a:t>Divergence and transport balls of growing radius; the radii of the doubts.</a:t>
-            </a:r>
-            <a:endParaRPr lang="en-US" sz="1400" dirty="0"/>
-          </a:p>
-        </p:txBody>
-      </p:sp>
-      <p:sp>
-        <p:nvSpPr>
-          <p:cNvPr id="20" name="Number"/>
-          <p:cNvSpPr/>
-          <p:nvPr/>
-        </p:nvSpPr>
-        <p:spPr>
-          <a:xfrm>
-            <a:off x="8040411" y="2606040"/>
-            <a:ext cx="548640" cy="548640"/>
-          </a:xfrm>
-          <a:prstGeom prst="ellipse">
-            <a:avLst/>
-          </a:prstGeom>
-          <a:solidFill>
-            <a:schemeClr val="accent1"/>
-          </a:solidFill>
-          <a:ln w="6350">
-            <a:solidFill>
-              <a:schemeClr val="accent1"/>
-            </a:solidFill>
-            <a:prstDash val="solid"/>
-          </a:ln>
-        </p:spPr>
-      </p:sp>
-      <p:sp>
-        <p:nvSpPr>
-          <p:cNvPr id="21" name="Text 17"/>
-          <p:cNvSpPr txBox="1"/>
-          <p:nvPr/>
-        </p:nvSpPr>
-        <p:spPr>
-          <a:xfrm>
-            <a:off x="8040411" y="2606040"/>
-            <a:ext cx="548640" cy="548640"/>
-          </a:xfrm>
-          <a:prstGeom prst="rect">
-            <a:avLst/>
-          </a:prstGeom>
-          <a:noFill/>
-          <a:ln/>
-        </p:spPr>
-        <p:txBody>
-          <a:bodyPr wrap="square" lIns="0" tIns="0" rIns="0" bIns="0" rtlCol="0" anchor="ctr"/>
-          <a:lstStyle/>
-          <a:p>
-            <a:pPr algn="ctr" indent="0" marL="0">
-              <a:buNone/>
-            </a:pPr>
-            <a:r>
-              <a:rPr lang="en-US" sz="1600" b="1" dirty="0">
-                <a:solidFill>
-                  <a:schemeClr val="bg1"/>
-                </a:solidFill>
-                <a:latin typeface="Calibri" pitchFamily="34" charset="0"/>
-                <a:ea typeface="Calibri" pitchFamily="34" charset="-122"/>
-                <a:cs typeface="Calibri" pitchFamily="34" charset="-120"/>
-              </a:rPr>
-              <a:t>4</a:t>
-            </a:r>
-            <a:endParaRPr lang="en-US" sz="1600" dirty="0"/>
-          </a:p>
-        </p:txBody>
-      </p:sp>
-      <p:sp>
-        <p:nvSpPr>
-          <p:cNvPr id="22" name="Flow head"/>
-          <p:cNvSpPr txBox="1"/>
-          <p:nvPr/>
-        </p:nvSpPr>
-        <p:spPr>
-          <a:xfrm>
-            <a:off x="7278441" y="3291840"/>
-            <a:ext cx="2072579" cy="548640"/>
-          </a:xfrm>
-          <a:prstGeom prst="rect">
-            <a:avLst/>
-          </a:prstGeom>
-          <a:noFill/>
-          <a:ln/>
-        </p:spPr>
-        <p:txBody>
-          <a:bodyPr wrap="square" lIns="0" tIns="0" rIns="0" bIns="0" rtlCol="0" anchor="t"/>
-          <a:lstStyle/>
-          <a:p>
-            <a:pPr algn="ctr" indent="0" marL="0">
-              <a:buNone/>
-            </a:pPr>
-            <a:r>
-              <a:rPr lang="en-US" sz="1600" b="1" dirty="0">
-                <a:solidFill>
-                  <a:schemeClr val="tx1"/>
-                </a:solidFill>
-                <a:latin typeface="Cambria" pitchFamily="34" charset="0"/>
-                <a:ea typeface="Cambria" pitchFamily="34" charset="-122"/>
-                <a:cs typeface="Cambria" pitchFamily="34" charset="-120"/>
-              </a:rPr>
-              <a:t>Set a radius</a:t>
-            </a:r>
-            <a:endParaRPr lang="en-US" sz="1600" dirty="0"/>
-          </a:p>
-        </p:txBody>
-      </p:sp>
-      <p:sp>
-        <p:nvSpPr>
-          <p:cNvPr id="23" name="Flow text"/>
-          <p:cNvSpPr txBox="1"/>
-          <p:nvPr/>
-        </p:nvSpPr>
-        <p:spPr>
-          <a:xfrm>
-            <a:off x="7296729" y="3867912"/>
-            <a:ext cx="2036003" cy="1554480"/>
-          </a:xfrm>
-          <a:prstGeom prst="rect">
-            <a:avLst/>
-          </a:prstGeom>
-          <a:noFill/>
-          <a:ln/>
-        </p:spPr>
-        <p:txBody>
-          <a:bodyPr wrap="square" lIns="0" tIns="0" rIns="0" bIns="0" rtlCol="0" anchor="t"/>
-          <a:lstStyle/>
-          <a:p>
-            <a:pPr algn="ctr" indent="0" marL="0">
-              <a:buNone/>
-            </a:pPr>
-            <a:r>
-              <a:rPr lang="en-US" sz="1400" dirty="0">
-                <a:solidFill>
-                  <a:schemeClr val="tx2"/>
-                </a:solidFill>
-              </a:rPr>
-              <a:t>Records of 1,000 paths, radii against margins, reliability per dollar.</a:t>
-            </a:r>
-            <a:endParaRPr lang="en-US" sz="1400" dirty="0"/>
-          </a:p>
-        </p:txBody>
-      </p:sp>
-      <p:sp>
-        <p:nvSpPr>
-          <p:cNvPr id="24" name="Number"/>
-          <p:cNvSpPr/>
-          <p:nvPr/>
-        </p:nvSpPr>
-        <p:spPr>
-          <a:xfrm>
-            <a:off x="10259294" y="2606040"/>
-            <a:ext cx="548640" cy="548640"/>
-          </a:xfrm>
-          <a:prstGeom prst="ellipse">
-            <a:avLst/>
-          </a:prstGeom>
-          <a:solidFill>
-            <a:schemeClr val="accent1"/>
-          </a:solidFill>
-          <a:ln w="6350">
-            <a:solidFill>
-              <a:schemeClr val="accent1"/>
-            </a:solidFill>
-            <a:prstDash val="solid"/>
-          </a:ln>
-        </p:spPr>
-      </p:sp>
-      <p:sp>
-        <p:nvSpPr>
-          <p:cNvPr id="25" name="Text 21"/>
-          <p:cNvSpPr txBox="1"/>
-          <p:nvPr/>
-        </p:nvSpPr>
-        <p:spPr>
-          <a:xfrm>
-            <a:off x="10259294" y="2606040"/>
-            <a:ext cx="548640" cy="548640"/>
-          </a:xfrm>
-          <a:prstGeom prst="rect">
-            <a:avLst/>
-          </a:prstGeom>
-          <a:noFill/>
-          <a:ln/>
-        </p:spPr>
-        <p:txBody>
-          <a:bodyPr wrap="square" lIns="0" tIns="0" rIns="0" bIns="0" rtlCol="0" anchor="ctr"/>
-          <a:lstStyle/>
-          <a:p>
-            <a:pPr algn="ctr" indent="0" marL="0">
-              <a:buNone/>
-            </a:pPr>
-            <a:r>
-              <a:rPr lang="en-US" sz="1600" b="1" dirty="0">
-                <a:solidFill>
-                  <a:schemeClr val="bg1"/>
-                </a:solidFill>
-                <a:latin typeface="Calibri" pitchFamily="34" charset="0"/>
-                <a:ea typeface="Calibri" pitchFamily="34" charset="-122"/>
-                <a:cs typeface="Calibri" pitchFamily="34" charset="-120"/>
-              </a:rPr>
-              <a:t>5</a:t>
-            </a:r>
-            <a:endParaRPr lang="en-US" sz="1600" dirty="0"/>
-          </a:p>
-        </p:txBody>
-      </p:sp>
-      <p:sp>
-        <p:nvSpPr>
-          <p:cNvPr id="26" name="Flow head"/>
-          <p:cNvSpPr txBox="1"/>
-          <p:nvPr/>
-        </p:nvSpPr>
-        <p:spPr>
-          <a:xfrm>
-            <a:off x="9497324" y="3291840"/>
-            <a:ext cx="2072579" cy="548640"/>
-          </a:xfrm>
-          <a:prstGeom prst="rect">
-            <a:avLst/>
-          </a:prstGeom>
-          <a:noFill/>
-          <a:ln/>
-        </p:spPr>
-        <p:txBody>
-          <a:bodyPr wrap="square" lIns="0" tIns="0" rIns="0" bIns="0" rtlCol="0" anchor="t"/>
-          <a:lstStyle/>
-          <a:p>
-            <a:pPr algn="ctr" indent="0" marL="0">
-              <a:buNone/>
-            </a:pPr>
-            <a:r>
-              <a:rPr lang="en-US" sz="1600" b="1" dirty="0">
-                <a:solidFill>
-                  <a:schemeClr val="tx1"/>
-                </a:solidFill>
-                <a:latin typeface="Cambria" pitchFamily="34" charset="0"/>
-                <a:ea typeface="Cambria" pitchFamily="34" charset="-122"/>
-                <a:cs typeface="Cambria" pitchFamily="34" charset="-120"/>
-              </a:rPr>
-              <a:t>Moments only</a:t>
-            </a:r>
-            <a:endParaRPr lang="en-US" sz="1600" dirty="0"/>
-          </a:p>
-        </p:txBody>
-      </p:sp>
-      <p:sp>
-        <p:nvSpPr>
-          <p:cNvPr id="27" name="Flow text"/>
-          <p:cNvSpPr txBox="1"/>
-          <p:nvPr/>
-        </p:nvSpPr>
-        <p:spPr>
-          <a:xfrm>
-            <a:off x="9515612" y="3867912"/>
-            <a:ext cx="2036003" cy="1554480"/>
-          </a:xfrm>
-          <a:prstGeom prst="rect">
-            <a:avLst/>
-          </a:prstGeom>
-          <a:noFill/>
-          <a:ln/>
-        </p:spPr>
-        <p:txBody>
-          <a:bodyPr wrap="square" lIns="0" tIns="0" rIns="0" bIns="0" rtlCol="0" anchor="t"/>
-          <a:lstStyle/>
-          <a:p>
-            <a:pPr algn="ctr" indent="0" marL="0">
-              <a:buNone/>
-            </a:pPr>
-            <a:r>
-              <a:rPr lang="en-US" sz="1400" dirty="0">
-                <a:solidFill>
-                  <a:schemeClr val="tx2"/>
-                </a:solidFill>
-              </a:rPr>
-              <a:t>Each quarter's Cantelli bound and the cost of keeping all at 5%.</a:t>
-            </a:r>
-            <a:endParaRPr lang="en-US" sz="1400" dirty="0"/>
-          </a:p>
-        </p:txBody>
-      </p:sp>
-      <p:sp>
-        <p:nvSpPr>
-          <p:cNvPr id="28" name="Deliverable card"/>
-          <p:cNvSpPr/>
-          <p:nvPr/>
-        </p:nvSpPr>
-        <p:spPr>
-          <a:xfrm>
-            <a:off x="548640" y="5486400"/>
-            <a:ext cx="11094415" cy="685800"/>
+            <a:off x="548640" y="1691640"/>
+            <a:ext cx="3515258" cy="2103120"/>
           </a:xfrm>
           <a:prstGeom prst="roundRect">
             <a:avLst>
-              <a:gd name="adj" fmla="val 10667"/>
+              <a:gd name="adj" fmla="val 3478"/>
             </a:avLst>
           </a:prstGeom>
           <a:solidFill>
@@ -14926,14 +14242,14 @@
       </p:sp>
       <p:sp>
         <p:nvSpPr>
-          <p:cNvPr id="29" name="Deliverable"/>
+          <p:cNvPr id="6" name="Card label"/>
           <p:cNvSpPr txBox="1"/>
           <p:nvPr/>
         </p:nvSpPr>
         <p:spPr>
           <a:xfrm>
-            <a:off x="777240" y="5559552"/>
-            <a:ext cx="10637215" cy="539496"/>
+            <a:off x="731520" y="1819656"/>
+            <a:ext cx="3149498" cy="310896"/>
           </a:xfrm>
           <a:prstGeom prst="rect">
             <a:avLst/>
@@ -14949,22 +14265,779 @@
               <a:buNone/>
             </a:pPr>
             <a:r>
-              <a:rPr lang="en-US" sz="1400" b="1" dirty="0">
+              <a:rPr lang="en-US" sz="1300" b="1" dirty="0">
+                <a:solidFill>
+                  <a:schemeClr val="accent1"/>
+                </a:solidFill>
+              </a:rPr>
+              <a:t>The decision</a:t>
+            </a:r>
+            <a:endParaRPr lang="en-US" sz="1300" dirty="0"/>
+          </a:p>
+        </p:txBody>
+      </p:sp>
+      <p:sp>
+        <p:nvSpPr>
+          <p:cNvPr id="7" name="Card head"/>
+          <p:cNvSpPr txBox="1"/>
+          <p:nvPr/>
+        </p:nvSpPr>
+        <p:spPr>
+          <a:xfrm>
+            <a:off x="731520" y="2148840"/>
+            <a:ext cx="3149498" cy="576072"/>
+          </a:xfrm>
+          <a:prstGeom prst="rect">
+            <a:avLst/>
+          </a:prstGeom>
+          <a:noFill/>
+          <a:ln/>
+        </p:spPr>
+        <p:txBody>
+          <a:bodyPr wrap="square" lIns="0" tIns="0" rIns="0" bIns="0" rtlCol="0" anchor="t"/>
+          <a:lstStyle/>
+          <a:p>
+            <a:pPr indent="0" marL="0">
+              <a:buNone/>
+            </a:pPr>
+            <a:r>
+              <a:rPr lang="en-US" sz="1600" b="1" dirty="0">
                 <a:solidFill>
                   <a:schemeClr val="tx1"/>
                 </a:solidFill>
-              </a:rPr>
-              <a:t>Deliverable:</a:t>
-            </a:r>
-            <a:r>
-              <a:rPr lang="en-US" sz="1400" dirty="0">
+                <a:latin typeface="Cambria" pitchFamily="34" charset="0"/>
+                <a:ea typeface="Cambria" pitchFamily="34" charset="-122"/>
+                <a:cs typeface="Cambria" pitchFamily="34" charset="-120"/>
+              </a:rPr>
+              <a:t>Close the supply–demand gap</a:t>
+            </a:r>
+            <a:endParaRPr lang="en-US" sz="1600" dirty="0"/>
+          </a:p>
+        </p:txBody>
+      </p:sp>
+      <p:sp>
+        <p:nvSpPr>
+          <p:cNvPr id="8" name="Card text"/>
+          <p:cNvSpPr txBox="1"/>
+          <p:nvPr/>
+        </p:nvSpPr>
+        <p:spPr>
+          <a:xfrm>
+            <a:off x="731520" y="2798064"/>
+            <a:ext cx="3149498" cy="868680"/>
+          </a:xfrm>
+          <a:prstGeom prst="rect">
+            <a:avLst/>
+          </a:prstGeom>
+          <a:noFill/>
+          <a:ln/>
+        </p:spPr>
+        <p:txBody>
+          <a:bodyPr wrap="square" lIns="0" tIns="0" rIns="0" bIns="0" rtlCol="0" anchor="t"/>
+          <a:lstStyle/>
+          <a:p>
+            <a:pPr indent="0" marL="0">
+              <a:buNone/>
+            </a:pPr>
+            <a:r>
+              <a:rPr lang="en-US" sz="1300" dirty="0">
+                <a:solidFill>
+                  <a:schemeClr val="tx2"/>
+                </a:solidFill>
+              </a:rPr>
+              <a:t>Through 2060, without knowing which description of the river's flows is right.</a:t>
+            </a:r>
+            <a:endParaRPr lang="en-US" sz="1300" dirty="0"/>
+          </a:p>
+        </p:txBody>
+      </p:sp>
+      <p:sp>
+        <p:nvSpPr>
+          <p:cNvPr id="9" name="Card"/>
+          <p:cNvSpPr/>
+          <p:nvPr/>
+        </p:nvSpPr>
+        <p:spPr>
+          <a:xfrm>
+            <a:off x="4338218" y="1691640"/>
+            <a:ext cx="3515258" cy="2103120"/>
+          </a:xfrm>
+          <a:prstGeom prst="roundRect">
+            <a:avLst>
+              <a:gd name="adj" fmla="val 3478"/>
+            </a:avLst>
+          </a:prstGeom>
+          <a:solidFill>
+            <a:schemeClr val="bg2"/>
+          </a:solidFill>
+          <a:ln w="9525">
+            <a:solidFill>
+              <a:srgbClr val="C4CBD8"/>
+            </a:solidFill>
+            <a:prstDash val="solid"/>
+          </a:ln>
+        </p:spPr>
+      </p:sp>
+      <p:sp>
+        <p:nvSpPr>
+          <p:cNvPr id="10" name="Card label"/>
+          <p:cNvSpPr txBox="1"/>
+          <p:nvPr/>
+        </p:nvSpPr>
+        <p:spPr>
+          <a:xfrm>
+            <a:off x="4521098" y="1819656"/>
+            <a:ext cx="3149498" cy="310896"/>
+          </a:xfrm>
+          <a:prstGeom prst="rect">
+            <a:avLst/>
+          </a:prstGeom>
+          <a:noFill/>
+          <a:ln/>
+        </p:spPr>
+        <p:txBody>
+          <a:bodyPr wrap="square" lIns="0" tIns="0" rIns="0" bIns="0" rtlCol="0" anchor="ctr"/>
+          <a:lstStyle/>
+          <a:p>
+            <a:pPr indent="0" marL="0">
+              <a:buNone/>
+            </a:pPr>
+            <a:r>
+              <a:rPr lang="en-US" sz="1300" b="1" dirty="0">
+                <a:solidFill>
+                  <a:schemeClr val="accent1"/>
+                </a:solidFill>
+              </a:rPr>
+              <a:t>The method</a:t>
+            </a:r>
+            <a:endParaRPr lang="en-US" sz="1300" dirty="0"/>
+          </a:p>
+        </p:txBody>
+      </p:sp>
+      <p:sp>
+        <p:nvSpPr>
+          <p:cNvPr id="11" name="Card head"/>
+          <p:cNvSpPr txBox="1"/>
+          <p:nvPr/>
+        </p:nvSpPr>
+        <p:spPr>
+          <a:xfrm>
+            <a:off x="4521098" y="2148840"/>
+            <a:ext cx="3149498" cy="576072"/>
+          </a:xfrm>
+          <a:prstGeom prst="rect">
+            <a:avLst/>
+          </a:prstGeom>
+          <a:noFill/>
+          <a:ln/>
+        </p:spPr>
+        <p:txBody>
+          <a:bodyPr wrap="square" lIns="0" tIns="0" rIns="0" bIns="0" rtlCol="0" anchor="t"/>
+          <a:lstStyle/>
+          <a:p>
+            <a:pPr indent="0" marL="0">
+              <a:buNone/>
+            </a:pPr>
+            <a:r>
+              <a:rPr lang="en-US" sz="1600" b="1" dirty="0">
                 <a:solidFill>
                   <a:schemeClr val="tx1"/>
                 </a:solidFill>
-              </a:rPr>
-              <a:t> a one-page note to the board: the records' doubts, the family's worst law and its package, the price of ambiguity, and the record worth improving. About 75 minutes.</a:t>
-            </a:r>
-            <a:endParaRPr lang="en-US" sz="1400" dirty="0"/>
+                <a:latin typeface="Cambria" pitchFamily="34" charset="0"/>
+                <a:ea typeface="Cambria" pitchFamily="34" charset="-122"/>
+                <a:cs typeface="Cambria" pitchFamily="34" charset="-120"/>
+              </a:rPr>
+              <a:t>A family of four laws</a:t>
+            </a:r>
+            <a:endParaRPr lang="en-US" sz="1600" dirty="0"/>
+          </a:p>
+        </p:txBody>
+      </p:sp>
+      <p:sp>
+        <p:nvSpPr>
+          <p:cNvPr id="12" name="Card text"/>
+          <p:cNvSpPr txBox="1"/>
+          <p:nvPr/>
+        </p:nvSpPr>
+        <p:spPr>
+          <a:xfrm>
+            <a:off x="4521098" y="2798064"/>
+            <a:ext cx="3149498" cy="868680"/>
+          </a:xfrm>
+          <a:prstGeom prst="rect">
+            <a:avLst/>
+          </a:prstGeom>
+          <a:noFill/>
+          <a:ln/>
+        </p:spPr>
+        <p:txBody>
+          <a:bodyPr wrap="square" lIns="0" tIns="0" rIns="0" bIns="0" rtlCol="0" anchor="t"/>
+          <a:lstStyle/>
+          <a:p>
+            <a:pPr indent="0" marL="0">
+              <a:buNone/>
+            </a:pPr>
+            <a:r>
+              <a:rPr lang="en-US" sz="1300" dirty="0">
+                <a:solidFill>
+                  <a:schemeClr val="tx2"/>
+                </a:solidFill>
+              </a:rPr>
+              <a:t>Observed, paleo, blended, and climate-projected supply; over 20,000 simulations for every portfolio.</a:t>
+            </a:r>
+            <a:endParaRPr lang="en-US" sz="1300" dirty="0"/>
+          </a:p>
+        </p:txBody>
+      </p:sp>
+      <p:sp>
+        <p:nvSpPr>
+          <p:cNvPr id="13" name="Card"/>
+          <p:cNvSpPr/>
+          <p:nvPr/>
+        </p:nvSpPr>
+        <p:spPr>
+          <a:xfrm>
+            <a:off x="8127797" y="1691640"/>
+            <a:ext cx="3515258" cy="2103120"/>
+          </a:xfrm>
+          <a:prstGeom prst="roundRect">
+            <a:avLst>
+              <a:gd name="adj" fmla="val 3478"/>
+            </a:avLst>
+          </a:prstGeom>
+          <a:solidFill>
+            <a:schemeClr val="tx1"/>
+          </a:solidFill>
+          <a:ln w="9525">
+            <a:solidFill>
+              <a:srgbClr val="0F1E3D"/>
+            </a:solidFill>
+            <a:prstDash val="solid"/>
+          </a:ln>
+        </p:spPr>
+      </p:sp>
+      <p:sp>
+        <p:nvSpPr>
+          <p:cNvPr id="14" name="Card label"/>
+          <p:cNvSpPr txBox="1"/>
+          <p:nvPr/>
+        </p:nvSpPr>
+        <p:spPr>
+          <a:xfrm>
+            <a:off x="8310677" y="1819656"/>
+            <a:ext cx="3149498" cy="310896"/>
+          </a:xfrm>
+          <a:prstGeom prst="rect">
+            <a:avLst/>
+          </a:prstGeom>
+          <a:noFill/>
+          <a:ln/>
+        </p:spPr>
+        <p:txBody>
+          <a:bodyPr wrap="square" lIns="0" tIns="0" rIns="0" bIns="0" rtlCol="0" anchor="ctr"/>
+          <a:lstStyle/>
+          <a:p>
+            <a:pPr indent="0" marL="0">
+              <a:buNone/>
+            </a:pPr>
+            <a:r>
+              <a:rPr lang="en-US" sz="1300" b="1" dirty="0">
+                <a:solidFill>
+                  <a:schemeClr val="accent1"/>
+                </a:solidFill>
+              </a:rPr>
+              <a:t>The result</a:t>
+            </a:r>
+            <a:endParaRPr lang="en-US" sz="1300" dirty="0"/>
+          </a:p>
+        </p:txBody>
+      </p:sp>
+      <p:sp>
+        <p:nvSpPr>
+          <p:cNvPr id="15" name="Card head"/>
+          <p:cNvSpPr txBox="1"/>
+          <p:nvPr/>
+        </p:nvSpPr>
+        <p:spPr>
+          <a:xfrm>
+            <a:off x="8310677" y="2148840"/>
+            <a:ext cx="3149498" cy="576072"/>
+          </a:xfrm>
+          <a:prstGeom prst="rect">
+            <a:avLst/>
+          </a:prstGeom>
+          <a:noFill/>
+          <a:ln/>
+        </p:spPr>
+        <p:txBody>
+          <a:bodyPr wrap="square" lIns="0" tIns="0" rIns="0" bIns="0" rtlCol="0" anchor="t"/>
+          <a:lstStyle/>
+          <a:p>
+            <a:pPr indent="0" marL="0">
+              <a:buNone/>
+            </a:pPr>
+            <a:r>
+              <a:rPr lang="en-US" sz="1600" b="1" dirty="0">
+                <a:solidFill>
+                  <a:schemeClr val="bg1"/>
+                </a:solidFill>
+                <a:latin typeface="Cambria" pitchFamily="34" charset="0"/>
+                <a:ea typeface="Cambria" pitchFamily="34" charset="-122"/>
+                <a:cs typeface="Cambria" pitchFamily="34" charset="-120"/>
+              </a:rPr>
+              <a:t>The price of doubt, explicit</a:t>
+            </a:r>
+            <a:endParaRPr lang="en-US" sz="1600" dirty="0"/>
+          </a:p>
+        </p:txBody>
+      </p:sp>
+      <p:sp>
+        <p:nvSpPr>
+          <p:cNvPr id="16" name="Card text"/>
+          <p:cNvSpPr txBox="1"/>
+          <p:nvPr/>
+        </p:nvSpPr>
+        <p:spPr>
+          <a:xfrm>
+            <a:off x="8310677" y="2798064"/>
+            <a:ext cx="3149498" cy="868680"/>
+          </a:xfrm>
+          <a:prstGeom prst="rect">
+            <a:avLst/>
+          </a:prstGeom>
+          <a:noFill/>
+          <a:ln/>
+        </p:spPr>
+        <p:txBody>
+          <a:bodyPr wrap="square" lIns="0" tIns="0" rIns="0" bIns="0" rtlCol="0" anchor="t"/>
+          <a:lstStyle/>
+          <a:p>
+            <a:pPr indent="0" marL="0">
+              <a:buNone/>
+            </a:pPr>
+            <a:r>
+              <a:rPr lang="en-US" sz="1300" dirty="0">
+                <a:solidFill>
+                  <a:schemeClr val="bg2"/>
+                </a:solidFill>
+              </a:rPr>
+              <a:t>2060 portfolio costs of $2.5–3.5bn at the observed-flow median, $3.6–5.8bn under the climate projections.</a:t>
+            </a:r>
+            <a:endParaRPr lang="en-US" sz="1300" dirty="0"/>
+          </a:p>
+        </p:txBody>
+      </p:sp>
+      <p:sp>
+        <p:nvSpPr>
+          <p:cNvPr id="17" name="Card"/>
+          <p:cNvSpPr/>
+          <p:nvPr/>
+        </p:nvSpPr>
+        <p:spPr>
+          <a:xfrm>
+            <a:off x="548640" y="4069080"/>
+            <a:ext cx="3515258" cy="2103120"/>
+          </a:xfrm>
+          <a:prstGeom prst="roundRect">
+            <a:avLst>
+              <a:gd name="adj" fmla="val 3478"/>
+            </a:avLst>
+          </a:prstGeom>
+          <a:solidFill>
+            <a:schemeClr val="bg2"/>
+          </a:solidFill>
+          <a:ln w="9525">
+            <a:solidFill>
+              <a:srgbClr val="C4CBD8"/>
+            </a:solidFill>
+            <a:prstDash val="solid"/>
+          </a:ln>
+        </p:spPr>
+      </p:sp>
+      <p:sp>
+        <p:nvSpPr>
+          <p:cNvPr id="18" name="Card label"/>
+          <p:cNvSpPr txBox="1"/>
+          <p:nvPr/>
+        </p:nvSpPr>
+        <p:spPr>
+          <a:xfrm>
+            <a:off x="731520" y="4197096"/>
+            <a:ext cx="3149498" cy="310896"/>
+          </a:xfrm>
+          <a:prstGeom prst="rect">
+            <a:avLst/>
+          </a:prstGeom>
+          <a:noFill/>
+          <a:ln/>
+        </p:spPr>
+        <p:txBody>
+          <a:bodyPr wrap="square" lIns="0" tIns="0" rIns="0" bIns="0" rtlCol="0" anchor="ctr"/>
+          <a:lstStyle/>
+          <a:p>
+            <a:pPr indent="0" marL="0">
+              <a:buNone/>
+            </a:pPr>
+            <a:r>
+              <a:rPr lang="en-US" sz="1300" b="1" dirty="0">
+                <a:solidFill>
+                  <a:schemeClr val="accent1"/>
+                </a:solidFill>
+              </a:rPr>
+              <a:t>Making it work</a:t>
+            </a:r>
+            <a:endParaRPr lang="en-US" sz="1300" dirty="0"/>
+          </a:p>
+        </p:txBody>
+      </p:sp>
+      <p:sp>
+        <p:nvSpPr>
+          <p:cNvPr id="19" name="Card head"/>
+          <p:cNvSpPr txBox="1"/>
+          <p:nvPr/>
+        </p:nvSpPr>
+        <p:spPr>
+          <a:xfrm>
+            <a:off x="731520" y="4526280"/>
+            <a:ext cx="3149498" cy="576072"/>
+          </a:xfrm>
+          <a:prstGeom prst="rect">
+            <a:avLst/>
+          </a:prstGeom>
+          <a:noFill/>
+          <a:ln/>
+        </p:spPr>
+        <p:txBody>
+          <a:bodyPr wrap="square" lIns="0" tIns="0" rIns="0" bIns="0" rtlCol="0" anchor="t"/>
+          <a:lstStyle/>
+          <a:p>
+            <a:pPr indent="0" marL="0">
+              <a:buNone/>
+            </a:pPr>
+            <a:r>
+              <a:rPr lang="en-US" sz="1600" b="1" dirty="0">
+                <a:solidFill>
+                  <a:schemeClr val="tx1"/>
+                </a:solidFill>
+                <a:latin typeface="Cambria" pitchFamily="34" charset="0"/>
+                <a:ea typeface="Cambria" pitchFamily="34" charset="-122"/>
+                <a:cs typeface="Cambria" pitchFamily="34" charset="-120"/>
+              </a:rPr>
+              <a:t>Options only when needed</a:t>
+            </a:r>
+            <a:endParaRPr lang="en-US" sz="1600" dirty="0"/>
+          </a:p>
+        </p:txBody>
+      </p:sp>
+      <p:sp>
+        <p:nvSpPr>
+          <p:cNvPr id="20" name="Card text"/>
+          <p:cNvSpPr txBox="1"/>
+          <p:nvPr/>
+        </p:nvSpPr>
+        <p:spPr>
+          <a:xfrm>
+            <a:off x="731520" y="5175504"/>
+            <a:ext cx="3149498" cy="868680"/>
+          </a:xfrm>
+          <a:prstGeom prst="rect">
+            <a:avLst/>
+          </a:prstGeom>
+          <a:noFill/>
+          <a:ln/>
+        </p:spPr>
+        <p:txBody>
+          <a:bodyPr wrap="square" lIns="0" tIns="0" rIns="0" bIns="0" rtlCol="0" anchor="t"/>
+          <a:lstStyle/>
+          <a:p>
+            <a:pPr indent="0" marL="0">
+              <a:buNone/>
+            </a:pPr>
+            <a:r>
+              <a:rPr lang="en-US" sz="1300" dirty="0">
+                <a:solidFill>
+                  <a:schemeClr val="tx2"/>
+                </a:solidFill>
+              </a:rPr>
+              <a:t>Portfolios triggered options against specific vulnerabilities; the study itself chose no portfolio.</a:t>
+            </a:r>
+            <a:endParaRPr lang="en-US" sz="1300" dirty="0"/>
+          </a:p>
+        </p:txBody>
+      </p:sp>
+      <p:sp>
+        <p:nvSpPr>
+          <p:cNvPr id="21" name="Card"/>
+          <p:cNvSpPr/>
+          <p:nvPr/>
+        </p:nvSpPr>
+        <p:spPr>
+          <a:xfrm>
+            <a:off x="4338218" y="4069080"/>
+            <a:ext cx="3515258" cy="2103120"/>
+          </a:xfrm>
+          <a:prstGeom prst="roundRect">
+            <a:avLst>
+              <a:gd name="adj" fmla="val 3478"/>
+            </a:avLst>
+          </a:prstGeom>
+          <a:solidFill>
+            <a:schemeClr val="bg2"/>
+          </a:solidFill>
+          <a:ln w="9525">
+            <a:solidFill>
+              <a:srgbClr val="C4CBD8"/>
+            </a:solidFill>
+            <a:prstDash val="solid"/>
+          </a:ln>
+        </p:spPr>
+      </p:sp>
+      <p:sp>
+        <p:nvSpPr>
+          <p:cNvPr id="22" name="Card label"/>
+          <p:cNvSpPr txBox="1"/>
+          <p:nvPr/>
+        </p:nvSpPr>
+        <p:spPr>
+          <a:xfrm>
+            <a:off x="4521098" y="4197096"/>
+            <a:ext cx="3149498" cy="310896"/>
+          </a:xfrm>
+          <a:prstGeom prst="rect">
+            <a:avLst/>
+          </a:prstGeom>
+          <a:noFill/>
+          <a:ln/>
+        </p:spPr>
+        <p:txBody>
+          <a:bodyPr wrap="square" lIns="0" tIns="0" rIns="0" bIns="0" rtlCol="0" anchor="ctr"/>
+          <a:lstStyle/>
+          <a:p>
+            <a:pPr indent="0" marL="0">
+              <a:buNone/>
+            </a:pPr>
+            <a:r>
+              <a:rPr lang="en-US" sz="1300" b="1" dirty="0">
+                <a:solidFill>
+                  <a:schemeClr val="accent1"/>
+                </a:solidFill>
+              </a:rPr>
+              <a:t>What Meridian takes</a:t>
+            </a:r>
+            <a:endParaRPr lang="en-US" sz="1300" dirty="0"/>
+          </a:p>
+        </p:txBody>
+      </p:sp>
+      <p:sp>
+        <p:nvSpPr>
+          <p:cNvPr id="23" name="Card head"/>
+          <p:cNvSpPr txBox="1"/>
+          <p:nvPr/>
+        </p:nvSpPr>
+        <p:spPr>
+          <a:xfrm>
+            <a:off x="4521098" y="4526280"/>
+            <a:ext cx="3149498" cy="576072"/>
+          </a:xfrm>
+          <a:prstGeom prst="rect">
+            <a:avLst/>
+          </a:prstGeom>
+          <a:noFill/>
+          <a:ln/>
+        </p:spPr>
+        <p:txBody>
+          <a:bodyPr wrap="square" lIns="0" tIns="0" rIns="0" bIns="0" rtlCol="0" anchor="t"/>
+          <a:lstStyle/>
+          <a:p>
+            <a:pPr indent="0" marL="0">
+              <a:buNone/>
+            </a:pPr>
+            <a:r>
+              <a:rPr lang="en-US" sz="1600" b="1" dirty="0">
+                <a:solidFill>
+                  <a:schemeClr val="tx1"/>
+                </a:solidFill>
+                <a:latin typeface="Cambria" pitchFamily="34" charset="0"/>
+                <a:ea typeface="Cambria" pitchFamily="34" charset="-122"/>
+                <a:cs typeface="Cambria" pitchFamily="34" charset="-120"/>
+              </a:rPr>
+              <a:t>The family the records allow</a:t>
+            </a:r>
+            <a:endParaRPr lang="en-US" sz="1600" dirty="0"/>
+          </a:p>
+        </p:txBody>
+      </p:sp>
+      <p:sp>
+        <p:nvSpPr>
+          <p:cNvPr id="24" name="Card text"/>
+          <p:cNvSpPr txBox="1"/>
+          <p:nvPr/>
+        </p:nvSpPr>
+        <p:spPr>
+          <a:xfrm>
+            <a:off x="4521098" y="5175504"/>
+            <a:ext cx="3149498" cy="868680"/>
+          </a:xfrm>
+          <a:prstGeom prst="rect">
+            <a:avLst/>
+          </a:prstGeom>
+          <a:noFill/>
+          <a:ln/>
+        </p:spPr>
+        <p:txBody>
+          <a:bodyPr wrap="square" lIns="0" tIns="0" rIns="0" bIns="0" rtlCol="0" anchor="t"/>
+          <a:lstStyle/>
+          <a:p>
+            <a:pPr indent="0" marL="0">
+              <a:buNone/>
+            </a:pPr>
+            <a:r>
+              <a:rPr lang="en-US" sz="1300" dirty="0">
+                <a:solidFill>
+                  <a:schemeClr val="tx2"/>
+                </a:solidFill>
+              </a:rPr>
+              <a:t>Worked Example 11.1: Meridian's records allow laws under which the package breaches far more often.</a:t>
+            </a:r>
+            <a:endParaRPr lang="en-US" sz="1300" dirty="0"/>
+          </a:p>
+        </p:txBody>
+      </p:sp>
+      <p:sp>
+        <p:nvSpPr>
+          <p:cNvPr id="25" name="Card"/>
+          <p:cNvSpPr/>
+          <p:nvPr/>
+        </p:nvSpPr>
+        <p:spPr>
+          <a:xfrm>
+            <a:off x="8127797" y="4069080"/>
+            <a:ext cx="3515258" cy="2103120"/>
+          </a:xfrm>
+          <a:prstGeom prst="roundRect">
+            <a:avLst>
+              <a:gd name="adj" fmla="val 3478"/>
+            </a:avLst>
+          </a:prstGeom>
+          <a:solidFill>
+            <a:schemeClr val="bg2"/>
+          </a:solidFill>
+          <a:ln w="9525">
+            <a:solidFill>
+              <a:srgbClr val="C4CBD8"/>
+            </a:solidFill>
+            <a:prstDash val="solid"/>
+          </a:ln>
+        </p:spPr>
+      </p:sp>
+      <p:sp>
+        <p:nvSpPr>
+          <p:cNvPr id="26" name="Card label"/>
+          <p:cNvSpPr txBox="1"/>
+          <p:nvPr/>
+        </p:nvSpPr>
+        <p:spPr>
+          <a:xfrm>
+            <a:off x="8310677" y="4197096"/>
+            <a:ext cx="3149498" cy="310896"/>
+          </a:xfrm>
+          <a:prstGeom prst="rect">
+            <a:avLst/>
+          </a:prstGeom>
+          <a:noFill/>
+          <a:ln/>
+        </p:spPr>
+        <p:txBody>
+          <a:bodyPr wrap="square" lIns="0" tIns="0" rIns="0" bIns="0" rtlCol="0" anchor="ctr"/>
+          <a:lstStyle/>
+          <a:p>
+            <a:pPr indent="0" marL="0">
+              <a:buNone/>
+            </a:pPr>
+            <a:r>
+              <a:rPr lang="en-US" sz="1300" b="1" dirty="0">
+                <a:solidFill>
+                  <a:schemeClr val="accent1"/>
+                </a:solidFill>
+              </a:rPr>
+              <a:t>For the board</a:t>
+            </a:r>
+            <a:endParaRPr lang="en-US" sz="1300" dirty="0"/>
+          </a:p>
+        </p:txBody>
+      </p:sp>
+      <p:sp>
+        <p:nvSpPr>
+          <p:cNvPr id="27" name="Card head"/>
+          <p:cNvSpPr txBox="1"/>
+          <p:nvPr/>
+        </p:nvSpPr>
+        <p:spPr>
+          <a:xfrm>
+            <a:off x="8310677" y="4526280"/>
+            <a:ext cx="3149498" cy="576072"/>
+          </a:xfrm>
+          <a:prstGeom prst="rect">
+            <a:avLst/>
+          </a:prstGeom>
+          <a:noFill/>
+          <a:ln/>
+        </p:spPr>
+        <p:txBody>
+          <a:bodyPr wrap="square" lIns="0" tIns="0" rIns="0" bIns="0" rtlCol="0" anchor="t"/>
+          <a:lstStyle/>
+          <a:p>
+            <a:pPr indent="0" marL="0">
+              <a:buNone/>
+            </a:pPr>
+            <a:r>
+              <a:rPr lang="en-US" sz="1600" b="1" dirty="0">
+                <a:solidFill>
+                  <a:schemeClr val="tx1"/>
+                </a:solidFill>
+                <a:latin typeface="Cambria" pitchFamily="34" charset="0"/>
+                <a:ea typeface="Cambria" pitchFamily="34" charset="-122"/>
+                <a:cs typeface="Cambria" pitchFamily="34" charset="-120"/>
+              </a:rPr>
+              <a:t>What does our doubt cost?</a:t>
+            </a:r>
+            <a:endParaRPr lang="en-US" sz="1600" dirty="0"/>
+          </a:p>
+        </p:txBody>
+      </p:sp>
+      <p:sp>
+        <p:nvSpPr>
+          <p:cNvPr id="28" name="Card text"/>
+          <p:cNvSpPr txBox="1"/>
+          <p:nvPr/>
+        </p:nvSpPr>
+        <p:spPr>
+          <a:xfrm>
+            <a:off x="8310677" y="5175504"/>
+            <a:ext cx="3149498" cy="868680"/>
+          </a:xfrm>
+          <a:prstGeom prst="rect">
+            <a:avLst/>
+          </a:prstGeom>
+          <a:noFill/>
+          <a:ln/>
+        </p:spPr>
+        <p:txBody>
+          <a:bodyPr wrap="square" lIns="0" tIns="0" rIns="0" bIns="0" rtlCol="0" anchor="t"/>
+          <a:lstStyle/>
+          <a:p>
+            <a:pPr indent="0" marL="0">
+              <a:buNone/>
+            </a:pPr>
+            <a:r>
+              <a:rPr lang="en-US" sz="1300" dirty="0">
+                <a:solidFill>
+                  <a:schemeClr val="tx2"/>
+                </a:solidFill>
+              </a:rPr>
+              <a:t>How far does the bill move from the kindest law our records allow to the harshest?</a:t>
+            </a:r>
+            <a:endParaRPr lang="en-US" sz="1300" dirty="0"/>
           </a:p>
         </p:txBody>
       </p:sp>
@@ -15212,7 +15285,7 @@
                   <a:schemeClr val="accent1"/>
                 </a:solidFill>
               </a:rPr>
-              <a:t>KEY TAKEAWAYS</a:t>
+              <a:t>AXIOM LAB 2.11 · MODULE AXIOM-11</a:t>
             </a:r>
             <a:endParaRPr lang="en-US" sz="1200" dirty="0"/>
           </a:p>
@@ -15253,22 +15326,105 @@
                 <a:ea typeface="Cambria" pitchFamily="34" charset="-122"/>
                 <a:cs typeface="Cambria" pitchFamily="34" charset="-120"/>
               </a:rPr>
-              <a:t>What to carry forward</a:t>
+              <a:t>Records, families and balls, in AXIOM</a:t>
             </a:r>
             <a:endParaRPr lang="en-US" sz="3200" dirty="0"/>
           </a:p>
         </p:txBody>
       </p:sp>
-      <p:sp>
-        <p:nvSpPr>
-          <p:cNvPr id="5" name="Number"/>
+      <p:pic>
+        <p:nvPicPr>
+          <p:cNvPr id="5" name="AXIOM logo" descr="AXIOM">    </p:cNvPr>
+          <p:cNvPicPr>
+            <a:picLocks noChangeAspect="1"/>
+          </p:cNvPicPr>
+          <p:nvPr/>
+        </p:nvPicPr>
+        <p:blipFill>
+          <a:blip r:embed="rId1"/>
+          <a:stretch>
+            <a:fillRect/>
+          </a:stretch>
+        </p:blipFill>
+        <p:spPr>
+          <a:xfrm>
+            <a:off x="9539935" y="310896"/>
+            <a:ext cx="2103120" cy="420624"/>
+          </a:xfrm>
+          <a:prstGeom prst="rect">
+            <a:avLst/>
+          </a:prstGeom>
+        </p:spPr>
+      </p:pic>
+      <p:sp>
+        <p:nvSpPr>
+          <p:cNvPr id="6" name="Situation"/>
+          <p:cNvSpPr txBox="1"/>
+          <p:nvPr/>
+        </p:nvSpPr>
+        <p:spPr>
+          <a:xfrm>
+            <a:off x="548640" y="1645920"/>
+            <a:ext cx="11094415" cy="777240"/>
+          </a:xfrm>
+          <a:prstGeom prst="rect">
+            <a:avLst/>
+          </a:prstGeom>
+          <a:noFill/>
+          <a:ln/>
+        </p:spPr>
+        <p:txBody>
+          <a:bodyPr wrap="square" lIns="0" tIns="0" rIns="0" bIns="0" rtlCol="0" anchor="t"/>
+          <a:lstStyle/>
+          <a:p>
+            <a:pPr indent="0" marL="0">
+              <a:buNone/>
+            </a:pPr>
+            <a:r>
+              <a:rPr lang="en-US" sz="1500" dirty="0">
+                <a:solidFill>
+                  <a:schemeClr val="tx1"/>
+                </a:solidFill>
+              </a:rPr>
+              <a:t>The audit committee accepts Chapter 9's law as the offices' best estimate, but not as a fact. Open AXIOM, choose Lab 2.11 and load the Meridian ambiguity instance: Chapter 9's law and levers, the treasury's count of closures and the engineering office's record of deviations.</a:t>
+            </a:r>
+            <a:endParaRPr lang="en-US" sz="1500" dirty="0"/>
+          </a:p>
+        </p:txBody>
+      </p:sp>
+      <p:sp>
+        <p:nvSpPr>
+          <p:cNvPr id="7" name="Flow line"/>
           <p:cNvSpPr/>
           <p:nvPr/>
         </p:nvSpPr>
         <p:spPr>
           <a:xfrm>
-            <a:off x="548640" y="1737360"/>
-            <a:ext cx="566928" cy="566928"/>
+            <a:off x="1658082" y="2880360"/>
+            <a:ext cx="8875532" cy="0"/>
+          </a:xfrm>
+          <a:prstGeom prst="line">
+            <a:avLst/>
+          </a:prstGeom>
+          <a:noFill/>
+          <a:ln w="25400">
+            <a:solidFill>
+              <a:srgbClr val="C4CBD8"/>
+            </a:solidFill>
+            <a:prstDash val="solid"/>
+          </a:ln>
+        </p:spPr>
+      </p:sp>
+      <p:sp>
+        <p:nvSpPr>
+          <p:cNvPr id="8" name="Number"/>
+          <p:cNvSpPr/>
+          <p:nvPr/>
+        </p:nvSpPr>
+        <p:spPr>
+          <a:xfrm>
+            <a:off x="1383762" y="2606040"/>
+            <a:ext cx="548640" cy="548640"/>
           </a:xfrm>
           <a:prstGeom prst="ellipse">
             <a:avLst/>
@@ -15286,14 +15442,14 @@
       </p:sp>
       <p:sp>
         <p:nvSpPr>
-          <p:cNvPr id="6" name="Text 3"/>
+          <p:cNvPr id="9" name="Text 5"/>
           <p:cNvSpPr txBox="1"/>
           <p:nvPr/>
         </p:nvSpPr>
         <p:spPr>
           <a:xfrm>
-            <a:off x="548640" y="1737360"/>
-            <a:ext cx="566928" cy="566928"/>
+            <a:off x="1383762" y="2606040"/>
+            <a:ext cx="548640" cy="548640"/>
           </a:xfrm>
           <a:prstGeom prst="rect">
             <a:avLst/>
@@ -15309,7 +15465,7 @@
               <a:buNone/>
             </a:pPr>
             <a:r>
-              <a:rPr lang="en-US" sz="1500" b="1" dirty="0">
+              <a:rPr lang="en-US" sz="1600" b="1" dirty="0">
                 <a:solidFill>
                   <a:schemeClr val="bg1"/>
                 </a:solidFill>
@@ -15319,20 +15475,20 @@
               </a:rPr>
               <a:t>1</a:t>
             </a:r>
-            <a:endParaRPr lang="en-US" sz="1500" dirty="0"/>
-          </a:p>
-        </p:txBody>
-      </p:sp>
-      <p:sp>
-        <p:nvSpPr>
-          <p:cNvPr id="7" name="Row text"/>
+            <a:endParaRPr lang="en-US" sz="1600" dirty="0"/>
+          </a:p>
+        </p:txBody>
+      </p:sp>
+      <p:sp>
+        <p:nvSpPr>
+          <p:cNvPr id="10" name="Flow head"/>
           <p:cNvSpPr txBox="1"/>
           <p:nvPr/>
         </p:nvSpPr>
         <p:spPr>
           <a:xfrm>
-            <a:off x="1325880" y="1691640"/>
-            <a:ext cx="10317175" cy="841248"/>
+            <a:off x="621792" y="3291840"/>
+            <a:ext cx="2072579" cy="548640"/>
           </a:xfrm>
           <a:prstGeom prst="rect">
             <a:avLst/>
@@ -15341,34 +15497,73 @@
           <a:ln/>
         </p:spPr>
         <p:txBody>
-          <a:bodyPr wrap="square" lIns="0" tIns="0" rIns="0" bIns="0" rtlCol="0" anchor="ctr"/>
-          <a:lstStyle/>
-          <a:p>
-            <a:pPr indent="0" marL="0">
+          <a:bodyPr wrap="square" lIns="0" tIns="0" rIns="0" bIns="0" rtlCol="0" anchor="t"/>
+          <a:lstStyle/>
+          <a:p>
+            <a:pPr algn="ctr" indent="0" marL="0">
               <a:buNone/>
             </a:pPr>
             <a:r>
-              <a:rPr lang="en-US" sz="1500" dirty="0">
+              <a:rPr lang="en-US" sz="1600" b="1" dirty="0">
                 <a:solidFill>
                   <a:schemeClr val="tx1"/>
                 </a:solidFill>
-              </a:rPr>
-              <a:t>A family of laws declares that the law itself is in doubt. A distributionally robust decision keeps its commitments under every law in it: one law gives Chapter 9, every law on a set gives Chapter 10, and a family that holds the true law with known confidence makes the promise honest.</a:t>
-            </a:r>
-            <a:endParaRPr lang="en-US" sz="1500" dirty="0"/>
-          </a:p>
-        </p:txBody>
-      </p:sp>
-      <p:sp>
-        <p:nvSpPr>
-          <p:cNvPr id="8" name="Number"/>
+                <a:latin typeface="Cambria" pitchFamily="34" charset="0"/>
+                <a:ea typeface="Cambria" pitchFamily="34" charset="-122"/>
+                <a:cs typeface="Cambria" pitchFamily="34" charset="-120"/>
+              </a:rPr>
+              <a:t>Read the records</a:t>
+            </a:r>
+            <a:endParaRPr lang="en-US" sz="1600" dirty="0"/>
+          </a:p>
+        </p:txBody>
+      </p:sp>
+      <p:sp>
+        <p:nvSpPr>
+          <p:cNvPr id="11" name="Flow text"/>
+          <p:cNvSpPr txBox="1"/>
+          <p:nvPr/>
+        </p:nvSpPr>
+        <p:spPr>
+          <a:xfrm>
+            <a:off x="640080" y="3867912"/>
+            <a:ext cx="2036003" cy="1554480"/>
+          </a:xfrm>
+          <a:prstGeom prst="rect">
+            <a:avLst/>
+          </a:prstGeom>
+          <a:noFill/>
+          <a:ln/>
+        </p:spPr>
+        <p:txBody>
+          <a:bodyPr wrap="square" lIns="0" tIns="0" rIns="0" bIns="0" rtlCol="0" anchor="t"/>
+          <a:lstStyle/>
+          <a:p>
+            <a:pPr algn="ctr" indent="0" marL="0">
+              <a:buNone/>
+            </a:pPr>
+            <a:r>
+              <a:rPr lang="en-US" sz="1400" dirty="0">
+                <a:solidFill>
+                  <a:schemeClr val="tx2"/>
+                </a:solidFill>
+              </a:rPr>
+              <a:t>Confidence bounds for the rate and the spread; sweep each across its range.</a:t>
+            </a:r>
+            <a:endParaRPr lang="en-US" sz="1400" dirty="0"/>
+          </a:p>
+        </p:txBody>
+      </p:sp>
+      <p:sp>
+        <p:nvSpPr>
+          <p:cNvPr id="12" name="Number"/>
           <p:cNvSpPr/>
           <p:nvPr/>
         </p:nvSpPr>
         <p:spPr>
           <a:xfrm>
-            <a:off x="548640" y="2633472"/>
-            <a:ext cx="566928" cy="566928"/>
+            <a:off x="3602645" y="2606040"/>
+            <a:ext cx="548640" cy="548640"/>
           </a:xfrm>
           <a:prstGeom prst="ellipse">
             <a:avLst/>
@@ -15386,14 +15581,14 @@
       </p:sp>
       <p:sp>
         <p:nvSpPr>
-          <p:cNvPr id="9" name="Text 6"/>
+          <p:cNvPr id="13" name="Text 9"/>
           <p:cNvSpPr txBox="1"/>
           <p:nvPr/>
         </p:nvSpPr>
         <p:spPr>
           <a:xfrm>
-            <a:off x="548640" y="2633472"/>
-            <a:ext cx="566928" cy="566928"/>
+            <a:off x="3602645" y="2606040"/>
+            <a:ext cx="548640" cy="548640"/>
           </a:xfrm>
           <a:prstGeom prst="rect">
             <a:avLst/>
@@ -15409,7 +15604,7 @@
               <a:buNone/>
             </a:pPr>
             <a:r>
-              <a:rPr lang="en-US" sz="1500" b="1" dirty="0">
+              <a:rPr lang="en-US" sz="1600" b="1" dirty="0">
                 <a:solidFill>
                   <a:schemeClr val="bg1"/>
                 </a:solidFill>
@@ -15419,20 +15614,20 @@
               </a:rPr>
               <a:t>2</a:t>
             </a:r>
-            <a:endParaRPr lang="en-US" sz="1500" dirty="0"/>
-          </a:p>
-        </p:txBody>
-      </p:sp>
-      <p:sp>
-        <p:nvSpPr>
-          <p:cNvPr id="10" name="Row text"/>
+            <a:endParaRPr lang="en-US" sz="1600" dirty="0"/>
+          </a:p>
+        </p:txBody>
+      </p:sp>
+      <p:sp>
+        <p:nvSpPr>
+          <p:cNvPr id="14" name="Flow head"/>
           <p:cNvSpPr txBox="1"/>
           <p:nvPr/>
         </p:nvSpPr>
         <p:spPr>
           <a:xfrm>
-            <a:off x="1325880" y="2587752"/>
-            <a:ext cx="10317175" cy="841248"/>
+            <a:off x="2840675" y="3291840"/>
+            <a:ext cx="2072579" cy="548640"/>
           </a:xfrm>
           <a:prstGeom prst="rect">
             <a:avLst/>
@@ -15441,34 +15636,73 @@
           <a:ln/>
         </p:spPr>
         <p:txBody>
-          <a:bodyPr wrap="square" lIns="0" tIns="0" rIns="0" bIns="0" rtlCol="0" anchor="ctr"/>
-          <a:lstStyle/>
-          <a:p>
-            <a:pPr indent="0" marL="0">
+          <a:bodyPr wrap="square" lIns="0" tIns="0" rIns="0" bIns="0" rtlCol="0" anchor="t"/>
+          <a:lstStyle/>
+          <a:p>
+            <a:pPr algn="ctr" indent="0" marL="0">
               <a:buNone/>
             </a:pPr>
             <a:r>
-              <a:rPr lang="en-US" sz="1500" dirty="0">
+              <a:rPr lang="en-US" sz="1600" b="1" dirty="0">
                 <a:solidFill>
                   <a:schemeClr val="tx1"/>
                 </a:solidFill>
-              </a:rPr>
-              <a:t>Divergence balls reweight the law's futures. Their dual form is the entropic criterion with a tuned multiplier, and their worst chance is a formula, so a ball's appetite is a smaller appetite under the law.</a:t>
-            </a:r>
-            <a:endParaRPr lang="en-US" sz="1500" dirty="0"/>
-          </a:p>
-        </p:txBody>
-      </p:sp>
-      <p:sp>
-        <p:nvSpPr>
-          <p:cNvPr id="11" name="Number"/>
+                <a:latin typeface="Cambria" pitchFamily="34" charset="0"/>
+                <a:ea typeface="Cambria" pitchFamily="34" charset="-122"/>
+                <a:cs typeface="Cambria" pitchFamily="34" charset="-120"/>
+              </a:rPr>
+              <a:t>Price the family</a:t>
+            </a:r>
+            <a:endParaRPr lang="en-US" sz="1600" dirty="0"/>
+          </a:p>
+        </p:txBody>
+      </p:sp>
+      <p:sp>
+        <p:nvSpPr>
+          <p:cNvPr id="15" name="Flow text"/>
+          <p:cNvSpPr txBox="1"/>
+          <p:nvPr/>
+        </p:nvSpPr>
+        <p:spPr>
+          <a:xfrm>
+            <a:off x="2858963" y="3867912"/>
+            <a:ext cx="2036003" cy="1554480"/>
+          </a:xfrm>
+          <a:prstGeom prst="rect">
+            <a:avLst/>
+          </a:prstGeom>
+          <a:noFill/>
+          <a:ln/>
+        </p:spPr>
+        <p:txBody>
+          <a:bodyPr wrap="square" lIns="0" tIns="0" rIns="0" bIns="0" rtlCol="0" anchor="t"/>
+          <a:lstStyle/>
+          <a:p>
+            <a:pPr algn="ctr" indent="0" marL="0">
+              <a:buNone/>
+            </a:pPr>
+            <a:r>
+              <a:rPr lang="en-US" sz="1400" dirty="0">
+                <a:solidFill>
+                  <a:schemeClr val="tx2"/>
+                </a:solidFill>
+              </a:rPr>
+              <a:t>Its worst law, the cheapest package there, checked on fresh paths.</a:t>
+            </a:r>
+            <a:endParaRPr lang="en-US" sz="1400" dirty="0"/>
+          </a:p>
+        </p:txBody>
+      </p:sp>
+      <p:sp>
+        <p:nvSpPr>
+          <p:cNvPr id="16" name="Number"/>
           <p:cNvSpPr/>
           <p:nvPr/>
         </p:nvSpPr>
         <p:spPr>
           <a:xfrm>
-            <a:off x="548640" y="3529584"/>
-            <a:ext cx="566928" cy="566928"/>
+            <a:off x="5821528" y="2606040"/>
+            <a:ext cx="548640" cy="548640"/>
           </a:xfrm>
           <a:prstGeom prst="ellipse">
             <a:avLst/>
@@ -15486,14 +15720,14 @@
       </p:sp>
       <p:sp>
         <p:nvSpPr>
-          <p:cNvPr id="12" name="Text 9"/>
+          <p:cNvPr id="17" name="Text 13"/>
           <p:cNvSpPr txBox="1"/>
           <p:nvPr/>
         </p:nvSpPr>
         <p:spPr>
           <a:xfrm>
-            <a:off x="548640" y="3529584"/>
-            <a:ext cx="566928" cy="566928"/>
+            <a:off x="5821528" y="2606040"/>
+            <a:ext cx="548640" cy="548640"/>
           </a:xfrm>
           <a:prstGeom prst="rect">
             <a:avLst/>
@@ -15509,7 +15743,7 @@
               <a:buNone/>
             </a:pPr>
             <a:r>
-              <a:rPr lang="en-US" sz="1500" b="1" dirty="0">
+              <a:rPr lang="en-US" sz="1600" b="1" dirty="0">
                 <a:solidFill>
                   <a:schemeClr val="bg1"/>
                 </a:solidFill>
@@ -15519,20 +15753,20 @@
               </a:rPr>
               <a:t>3</a:t>
             </a:r>
-            <a:endParaRPr lang="en-US" sz="1500" dirty="0"/>
-          </a:p>
-        </p:txBody>
-      </p:sp>
-      <p:sp>
-        <p:nvSpPr>
-          <p:cNvPr id="13" name="Row text"/>
+            <a:endParaRPr lang="en-US" sz="1600" dirty="0"/>
+          </a:p>
+        </p:txBody>
+      </p:sp>
+      <p:sp>
+        <p:nvSpPr>
+          <p:cNvPr id="18" name="Flow head"/>
           <p:cNvSpPr txBox="1"/>
           <p:nvPr/>
         </p:nvSpPr>
         <p:spPr>
           <a:xfrm>
-            <a:off x="1325880" y="3483864"/>
-            <a:ext cx="10317175" cy="841248"/>
+            <a:off x="5059558" y="3291840"/>
+            <a:ext cx="2072579" cy="548640"/>
           </a:xfrm>
           <a:prstGeom prst="rect">
             <a:avLst/>
@@ -15541,34 +15775,73 @@
           <a:ln/>
         </p:spPr>
         <p:txBody>
-          <a:bodyPr wrap="square" lIns="0" tIns="0" rIns="0" bIns="0" rtlCol="0" anchor="ctr"/>
-          <a:lstStyle/>
-          <a:p>
-            <a:pPr indent="0" marL="0">
+          <a:bodyPr wrap="square" lIns="0" tIns="0" rIns="0" bIns="0" rtlCol="0" anchor="t"/>
+          <a:lstStyle/>
+          <a:p>
+            <a:pPr algn="ctr" indent="0" marL="0">
               <a:buNone/>
             </a:pPr>
             <a:r>
-              <a:rPr lang="en-US" sz="1500" dirty="0">
+              <a:rPr lang="en-US" sz="1600" b="1" dirty="0">
                 <a:solidFill>
                   <a:schemeClr val="tx1"/>
                 </a:solidFill>
-              </a:rPr>
-              <a:t>Wasserstein balls move futures. Their dual form adds a Lipschitz premium, and keeping a chance means the futures nearest a breach must keep an average margin; their radius suits a record's sampling error.</a:t>
-            </a:r>
-            <a:endParaRPr lang="en-US" sz="1500" dirty="0"/>
-          </a:p>
-        </p:txBody>
-      </p:sp>
-      <p:sp>
-        <p:nvSpPr>
-          <p:cNvPr id="14" name="Number"/>
+                <a:latin typeface="Cambria" pitchFamily="34" charset="0"/>
+                <a:ea typeface="Cambria" pitchFamily="34" charset="-122"/>
+                <a:cs typeface="Cambria" pitchFamily="34" charset="-120"/>
+              </a:rPr>
+              <a:t>Try balls</a:t>
+            </a:r>
+            <a:endParaRPr lang="en-US" sz="1600" dirty="0"/>
+          </a:p>
+        </p:txBody>
+      </p:sp>
+      <p:sp>
+        <p:nvSpPr>
+          <p:cNvPr id="19" name="Flow text"/>
+          <p:cNvSpPr txBox="1"/>
+          <p:nvPr/>
+        </p:nvSpPr>
+        <p:spPr>
+          <a:xfrm>
+            <a:off x="5077846" y="3867912"/>
+            <a:ext cx="2036003" cy="1554480"/>
+          </a:xfrm>
+          <a:prstGeom prst="rect">
+            <a:avLst/>
+          </a:prstGeom>
+          <a:noFill/>
+          <a:ln/>
+        </p:spPr>
+        <p:txBody>
+          <a:bodyPr wrap="square" lIns="0" tIns="0" rIns="0" bIns="0" rtlCol="0" anchor="t"/>
+          <a:lstStyle/>
+          <a:p>
+            <a:pPr algn="ctr" indent="0" marL="0">
+              <a:buNone/>
+            </a:pPr>
+            <a:r>
+              <a:rPr lang="en-US" sz="1400" dirty="0">
+                <a:solidFill>
+                  <a:schemeClr val="tx2"/>
+                </a:solidFill>
+              </a:rPr>
+              <a:t>Divergence and transport balls of growing radius; the radii of the doubts.</a:t>
+            </a:r>
+            <a:endParaRPr lang="en-US" sz="1400" dirty="0"/>
+          </a:p>
+        </p:txBody>
+      </p:sp>
+      <p:sp>
+        <p:nvSpPr>
+          <p:cNvPr id="20" name="Number"/>
           <p:cNvSpPr/>
           <p:nvPr/>
         </p:nvSpPr>
         <p:spPr>
           <a:xfrm>
-            <a:off x="548640" y="4425696"/>
-            <a:ext cx="566928" cy="566928"/>
+            <a:off x="8040411" y="2606040"/>
+            <a:ext cx="548640" cy="548640"/>
           </a:xfrm>
           <a:prstGeom prst="ellipse">
             <a:avLst/>
@@ -15586,14 +15859,14 @@
       </p:sp>
       <p:sp>
         <p:nvSpPr>
-          <p:cNvPr id="15" name="Text 12"/>
+          <p:cNvPr id="21" name="Text 17"/>
           <p:cNvSpPr txBox="1"/>
           <p:nvPr/>
         </p:nvSpPr>
         <p:spPr>
           <a:xfrm>
-            <a:off x="548640" y="4425696"/>
-            <a:ext cx="566928" cy="566928"/>
+            <a:off x="8040411" y="2606040"/>
+            <a:ext cx="548640" cy="548640"/>
           </a:xfrm>
           <a:prstGeom prst="rect">
             <a:avLst/>
@@ -15609,7 +15882,7 @@
               <a:buNone/>
             </a:pPr>
             <a:r>
-              <a:rPr lang="en-US" sz="1500" b="1" dirty="0">
+              <a:rPr lang="en-US" sz="1600" b="1" dirty="0">
                 <a:solidFill>
                   <a:schemeClr val="bg1"/>
                 </a:solidFill>
@@ -15619,20 +15892,20 @@
               </a:rPr>
               <a:t>4</a:t>
             </a:r>
-            <a:endParaRPr lang="en-US" sz="1500" dirty="0"/>
-          </a:p>
-        </p:txBody>
-      </p:sp>
-      <p:sp>
-        <p:nvSpPr>
-          <p:cNvPr id="16" name="Row text"/>
+            <a:endParaRPr lang="en-US" sz="1600" dirty="0"/>
+          </a:p>
+        </p:txBody>
+      </p:sp>
+      <p:sp>
+        <p:nvSpPr>
+          <p:cNvPr id="22" name="Flow head"/>
           <p:cNvSpPr txBox="1"/>
           <p:nvPr/>
         </p:nvSpPr>
         <p:spPr>
           <a:xfrm>
-            <a:off x="1325880" y="4379976"/>
-            <a:ext cx="10317175" cy="841248"/>
+            <a:off x="7278441" y="3291840"/>
+            <a:ext cx="2072579" cy="548640"/>
           </a:xfrm>
           <a:prstGeom prst="rect">
             <a:avLst/>
@@ -15641,34 +15914,73 @@
           <a:ln/>
         </p:spPr>
         <p:txBody>
-          <a:bodyPr wrap="square" lIns="0" tIns="0" rIns="0" bIns="0" rtlCol="0" anchor="ctr"/>
-          <a:lstStyle/>
-          <a:p>
-            <a:pPr indent="0" marL="0">
+          <a:bodyPr wrap="square" lIns="0" tIns="0" rIns="0" bIns="0" rtlCol="0" anchor="t"/>
+          <a:lstStyle/>
+          <a:p>
+            <a:pPr algn="ctr" indent="0" marL="0">
               <a:buNone/>
             </a:pPr>
             <a:r>
-              <a:rPr lang="en-US" sz="1500" dirty="0">
+              <a:rPr lang="en-US" sz="1600" b="1" dirty="0">
                 <a:solidFill>
                   <a:schemeClr val="tx1"/>
                 </a:solidFill>
-              </a:rPr>
-              <a:t>Moment families fear lumps: a two-point law attains Cantelli's bound, so averages alone ask for 4.36 spreads of margin at 5 percent.</a:t>
-            </a:r>
-            <a:endParaRPr lang="en-US" sz="1500" dirty="0"/>
-          </a:p>
-        </p:txBody>
-      </p:sp>
-      <p:sp>
-        <p:nvSpPr>
-          <p:cNvPr id="17" name="Number"/>
+                <a:latin typeface="Cambria" pitchFamily="34" charset="0"/>
+                <a:ea typeface="Cambria" pitchFamily="34" charset="-122"/>
+                <a:cs typeface="Cambria" pitchFamily="34" charset="-120"/>
+              </a:rPr>
+              <a:t>Set a radius</a:t>
+            </a:r>
+            <a:endParaRPr lang="en-US" sz="1600" dirty="0"/>
+          </a:p>
+        </p:txBody>
+      </p:sp>
+      <p:sp>
+        <p:nvSpPr>
+          <p:cNvPr id="23" name="Flow text"/>
+          <p:cNvSpPr txBox="1"/>
+          <p:nvPr/>
+        </p:nvSpPr>
+        <p:spPr>
+          <a:xfrm>
+            <a:off x="7296729" y="3867912"/>
+            <a:ext cx="2036003" cy="1554480"/>
+          </a:xfrm>
+          <a:prstGeom prst="rect">
+            <a:avLst/>
+          </a:prstGeom>
+          <a:noFill/>
+          <a:ln/>
+        </p:spPr>
+        <p:txBody>
+          <a:bodyPr wrap="square" lIns="0" tIns="0" rIns="0" bIns="0" rtlCol="0" anchor="t"/>
+          <a:lstStyle/>
+          <a:p>
+            <a:pPr algn="ctr" indent="0" marL="0">
+              <a:buNone/>
+            </a:pPr>
+            <a:r>
+              <a:rPr lang="en-US" sz="1400" dirty="0">
+                <a:solidFill>
+                  <a:schemeClr val="tx2"/>
+                </a:solidFill>
+              </a:rPr>
+              <a:t>Records of 1,000 paths, radii against margins, reliability per dollar.</a:t>
+            </a:r>
+            <a:endParaRPr lang="en-US" sz="1400" dirty="0"/>
+          </a:p>
+        </p:txBody>
+      </p:sp>
+      <p:sp>
+        <p:nvSpPr>
+          <p:cNvPr id="24" name="Number"/>
           <p:cNvSpPr/>
           <p:nvPr/>
         </p:nvSpPr>
         <p:spPr>
           <a:xfrm>
-            <a:off x="548640" y="5321808"/>
-            <a:ext cx="566928" cy="566928"/>
+            <a:off x="10259294" y="2606040"/>
+            <a:ext cx="548640" cy="548640"/>
           </a:xfrm>
           <a:prstGeom prst="ellipse">
             <a:avLst/>
@@ -15686,14 +15998,14 @@
       </p:sp>
       <p:sp>
         <p:nvSpPr>
-          <p:cNvPr id="18" name="Text 15"/>
+          <p:cNvPr id="25" name="Text 21"/>
           <p:cNvSpPr txBox="1"/>
           <p:nvPr/>
         </p:nvSpPr>
         <p:spPr>
           <a:xfrm>
-            <a:off x="548640" y="5321808"/>
-            <a:ext cx="566928" cy="566928"/>
+            <a:off x="10259294" y="2606040"/>
+            <a:ext cx="548640" cy="548640"/>
           </a:xfrm>
           <a:prstGeom prst="rect">
             <a:avLst/>
@@ -15709,7 +16021,7 @@
               <a:buNone/>
             </a:pPr>
             <a:r>
-              <a:rPr lang="en-US" sz="1500" b="1" dirty="0">
+              <a:rPr lang="en-US" sz="1600" b="1" dirty="0">
                 <a:solidFill>
                   <a:schemeClr val="bg1"/>
                 </a:solidFill>
@@ -15719,20 +16031,20 @@
               </a:rPr>
               <a:t>5</a:t>
             </a:r>
-            <a:endParaRPr lang="en-US" sz="1500" dirty="0"/>
-          </a:p>
-        </p:txBody>
-      </p:sp>
-      <p:sp>
-        <p:nvSpPr>
-          <p:cNvPr id="19" name="Row text"/>
+            <a:endParaRPr lang="en-US" sz="1600" dirty="0"/>
+          </a:p>
+        </p:txBody>
+      </p:sp>
+      <p:sp>
+        <p:nvSpPr>
+          <p:cNvPr id="26" name="Flow head"/>
           <p:cNvSpPr txBox="1"/>
           <p:nvPr/>
         </p:nvSpPr>
         <p:spPr>
           <a:xfrm>
-            <a:off x="1325880" y="5276088"/>
-            <a:ext cx="10317175" cy="841248"/>
+            <a:off x="9497324" y="3291840"/>
+            <a:ext cx="2072579" cy="548640"/>
           </a:xfrm>
           <a:prstGeom prst="rect">
             <a:avLst/>
@@ -15741,6 +16053,108 @@
           <a:ln/>
         </p:spPr>
         <p:txBody>
+          <a:bodyPr wrap="square" lIns="0" tIns="0" rIns="0" bIns="0" rtlCol="0" anchor="t"/>
+          <a:lstStyle/>
+          <a:p>
+            <a:pPr algn="ctr" indent="0" marL="0">
+              <a:buNone/>
+            </a:pPr>
+            <a:r>
+              <a:rPr lang="en-US" sz="1600" b="1" dirty="0">
+                <a:solidFill>
+                  <a:schemeClr val="tx1"/>
+                </a:solidFill>
+                <a:latin typeface="Cambria" pitchFamily="34" charset="0"/>
+                <a:ea typeface="Cambria" pitchFamily="34" charset="-122"/>
+                <a:cs typeface="Cambria" pitchFamily="34" charset="-120"/>
+              </a:rPr>
+              <a:t>Moments only</a:t>
+            </a:r>
+            <a:endParaRPr lang="en-US" sz="1600" dirty="0"/>
+          </a:p>
+        </p:txBody>
+      </p:sp>
+      <p:sp>
+        <p:nvSpPr>
+          <p:cNvPr id="27" name="Flow text"/>
+          <p:cNvSpPr txBox="1"/>
+          <p:nvPr/>
+        </p:nvSpPr>
+        <p:spPr>
+          <a:xfrm>
+            <a:off x="9515612" y="3867912"/>
+            <a:ext cx="2036003" cy="1554480"/>
+          </a:xfrm>
+          <a:prstGeom prst="rect">
+            <a:avLst/>
+          </a:prstGeom>
+          <a:noFill/>
+          <a:ln/>
+        </p:spPr>
+        <p:txBody>
+          <a:bodyPr wrap="square" lIns="0" tIns="0" rIns="0" bIns="0" rtlCol="0" anchor="t"/>
+          <a:lstStyle/>
+          <a:p>
+            <a:pPr algn="ctr" indent="0" marL="0">
+              <a:buNone/>
+            </a:pPr>
+            <a:r>
+              <a:rPr lang="en-US" sz="1400" dirty="0">
+                <a:solidFill>
+                  <a:schemeClr val="tx2"/>
+                </a:solidFill>
+              </a:rPr>
+              <a:t>Each quarter's Cantelli bound and the cost of keeping all at 5%.</a:t>
+            </a:r>
+            <a:endParaRPr lang="en-US" sz="1400" dirty="0"/>
+          </a:p>
+        </p:txBody>
+      </p:sp>
+      <p:sp>
+        <p:nvSpPr>
+          <p:cNvPr id="28" name="Deliverable card"/>
+          <p:cNvSpPr/>
+          <p:nvPr/>
+        </p:nvSpPr>
+        <p:spPr>
+          <a:xfrm>
+            <a:off x="548640" y="5486400"/>
+            <a:ext cx="11094415" cy="685800"/>
+          </a:xfrm>
+          <a:prstGeom prst="roundRect">
+            <a:avLst>
+              <a:gd name="adj" fmla="val 10667"/>
+            </a:avLst>
+          </a:prstGeom>
+          <a:solidFill>
+            <a:schemeClr val="bg2"/>
+          </a:solidFill>
+          <a:ln w="9525">
+            <a:solidFill>
+              <a:srgbClr val="C4CBD8"/>
+            </a:solidFill>
+            <a:prstDash val="solid"/>
+          </a:ln>
+        </p:spPr>
+      </p:sp>
+      <p:sp>
+        <p:nvSpPr>
+          <p:cNvPr id="29" name="Deliverable"/>
+          <p:cNvSpPr txBox="1"/>
+          <p:nvPr/>
+        </p:nvSpPr>
+        <p:spPr>
+          <a:xfrm>
+            <a:off x="777240" y="5559552"/>
+            <a:ext cx="10637215" cy="539496"/>
+          </a:xfrm>
+          <a:prstGeom prst="rect">
+            <a:avLst/>
+          </a:prstGeom>
+          <a:noFill/>
+          <a:ln/>
+        </p:spPr>
+        <p:txBody>
           <a:bodyPr wrap="square" lIns="0" tIns="0" rIns="0" bIns="0" rtlCol="0" anchor="ctr"/>
           <a:lstStyle/>
           <a:p>
@@ -15748,14 +16162,22 @@
               <a:buNone/>
             </a:pPr>
             <a:r>
-              <a:rPr lang="en-US" sz="1500" dirty="0">
+              <a:rPr lang="en-US" sz="1400" b="1" dirty="0">
                 <a:solidFill>
                   <a:schemeClr val="tx1"/>
                 </a:solidFill>
               </a:rPr>
-              <a:t>Records declare the family: confidence bounds for counts and spreads, their corner, and families over time declared stage by stage (Propositions 11.2–11.3; Table 11.2). For Meridian, the doubt costs $13.56 million, mostly the spread's.</a:t>
-            </a:r>
-            <a:endParaRPr lang="en-US" sz="1500" dirty="0"/>
+              <a:t>Deliverable:</a:t>
+            </a:r>
+            <a:r>
+              <a:rPr lang="en-US" sz="1400" dirty="0">
+                <a:solidFill>
+                  <a:schemeClr val="tx1"/>
+                </a:solidFill>
+              </a:rPr>
+              <a:t> a one-page note to the board: the records' doubts, the family's worst law and its package, the price of ambiguity, and the record worth improving. About 75 minutes.</a:t>
+            </a:r>
+            <a:endParaRPr lang="en-US" sz="1400" dirty="0"/>
           </a:p>
         </p:txBody>
       </p:sp>
@@ -15861,7 +16283,7 @@
                   <a:schemeClr val="accent1"/>
                 </a:solidFill>
               </a:rPr>
-              <a:t>THIS WEEK'S LABORATORY</a:t>
+              <a:t>KEY TAKEAWAYS</a:t>
             </a:r>
             <a:endParaRPr lang="en-US" sz="1200" dirty="0"/>
           </a:p>
@@ -15902,7 +16324,7 @@
                 <a:ea typeface="Cambria" pitchFamily="34" charset="-122"/>
                 <a:cs typeface="Cambria" pitchFamily="34" charset="-120"/>
               </a:rPr>
-              <a:t>Notebook and workbook reproduce the book</a:t>
+              <a:t>What to carry forward</a:t>
             </a:r>
             <a:endParaRPr lang="en-US" sz="3200" dirty="0"/>
           </a:p>
@@ -15910,26 +16332,24 @@
       </p:sp>
       <p:sp>
         <p:nvSpPr>
-          <p:cNvPr id="5" name="Stat card"/>
+          <p:cNvPr id="5" name="Number"/>
           <p:cNvSpPr/>
           <p:nvPr/>
         </p:nvSpPr>
         <p:spPr>
           <a:xfrm>
-            <a:off x="548640" y="1691640"/>
-            <a:ext cx="2567864" cy="1691640"/>
-          </a:xfrm>
-          <a:prstGeom prst="roundRect">
-            <a:avLst>
-              <a:gd name="adj" fmla="val 4324"/>
-            </a:avLst>
+            <a:off x="548640" y="1737360"/>
+            <a:ext cx="566928" cy="566928"/>
+          </a:xfrm>
+          <a:prstGeom prst="ellipse">
+            <a:avLst/>
           </a:prstGeom>
           <a:solidFill>
-            <a:schemeClr val="tx1"/>
+            <a:schemeClr val="accent1"/>
           </a:solidFill>
-          <a:ln w="9525">
+          <a:ln w="6350">
             <a:solidFill>
-              <a:srgbClr val="0F1E3D"/>
+              <a:schemeClr val="accent1"/>
             </a:solidFill>
             <a:prstDash val="solid"/>
           </a:ln>
@@ -15937,14 +16357,14 @@
       </p:sp>
       <p:sp>
         <p:nvSpPr>
-          <p:cNvPr id="6" name="Stat value"/>
+          <p:cNvPr id="6" name="Text 3"/>
           <p:cNvSpPr txBox="1"/>
           <p:nvPr/>
         </p:nvSpPr>
         <p:spPr>
           <a:xfrm>
-            <a:off x="685800" y="1801368"/>
-            <a:ext cx="2293544" cy="914400"/>
+            <a:off x="548640" y="1737360"/>
+            <a:ext cx="566928" cy="566928"/>
           </a:xfrm>
           <a:prstGeom prst="rect">
             <a:avLst/>
@@ -15960,30 +16380,30 @@
               <a:buNone/>
             </a:pPr>
             <a:r>
-              <a:rPr lang="en-US" sz="4400" b="1" dirty="0">
-                <a:solidFill>
-                  <a:schemeClr val="accent1"/>
-                </a:solidFill>
-                <a:latin typeface="Cambria" pitchFamily="34" charset="0"/>
-                <a:ea typeface="Cambria" pitchFamily="34" charset="-122"/>
-                <a:cs typeface="Cambria" pitchFamily="34" charset="-120"/>
-              </a:rPr>
-              <a:t>358</a:t>
-            </a:r>
-            <a:endParaRPr lang="en-US" sz="4400" dirty="0"/>
-          </a:p>
-        </p:txBody>
-      </p:sp>
-      <p:sp>
-        <p:nvSpPr>
-          <p:cNvPr id="7" name="Stat label"/>
+              <a:rPr lang="en-US" sz="1500" b="1" dirty="0">
+                <a:solidFill>
+                  <a:schemeClr val="bg1"/>
+                </a:solidFill>
+                <a:latin typeface="Calibri" pitchFamily="34" charset="0"/>
+                <a:ea typeface="Calibri" pitchFamily="34" charset="-122"/>
+                <a:cs typeface="Calibri" pitchFamily="34" charset="-120"/>
+              </a:rPr>
+              <a:t>1</a:t>
+            </a:r>
+            <a:endParaRPr lang="en-US" sz="1500" dirty="0"/>
+          </a:p>
+        </p:txBody>
+      </p:sp>
+      <p:sp>
+        <p:nvSpPr>
+          <p:cNvPr id="7" name="Row text"/>
           <p:cNvSpPr txBox="1"/>
           <p:nvPr/>
         </p:nvSpPr>
         <p:spPr>
           <a:xfrm>
-            <a:off x="685800" y="2697480"/>
-            <a:ext cx="2293544" cy="612648"/>
+            <a:off x="1325880" y="1691640"/>
+            <a:ext cx="10317175" cy="841248"/>
           </a:xfrm>
           <a:prstGeom prst="rect">
             <a:avLst/>
@@ -15992,46 +16412,44 @@
           <a:ln/>
         </p:spPr>
         <p:txBody>
-          <a:bodyPr wrap="square" lIns="0" tIns="0" rIns="0" bIns="0" rtlCol="0" anchor="t"/>
-          <a:lstStyle/>
-          <a:p>
-            <a:pPr algn="ctr" indent="0" marL="0">
+          <a:bodyPr wrap="square" lIns="0" tIns="0" rIns="0" bIns="0" rtlCol="0" anchor="ctr"/>
+          <a:lstStyle/>
+          <a:p>
+            <a:pPr indent="0" marL="0">
               <a:buNone/>
             </a:pPr>
             <a:r>
-              <a:rPr lang="en-US" sz="1400" dirty="0">
-                <a:solidFill>
-                  <a:schemeClr val="bg2"/>
-                </a:solidFill>
-              </a:rPr>
-              <a:t>notebook checkpoints, every one PASS</a:t>
-            </a:r>
-            <a:endParaRPr lang="en-US" sz="1400" dirty="0"/>
-          </a:p>
-        </p:txBody>
-      </p:sp>
-      <p:sp>
-        <p:nvSpPr>
-          <p:cNvPr id="8" name="Stat card"/>
+              <a:rPr lang="en-US" sz="1500" dirty="0">
+                <a:solidFill>
+                  <a:schemeClr val="tx1"/>
+                </a:solidFill>
+              </a:rPr>
+              <a:t>A family of laws declares that the law itself is in doubt. A distributionally robust decision keeps its commitments under every law in it: one law gives Chapter 9, every law on a set gives Chapter 10, and a family that holds the true law with known confidence makes the promise honest.</a:t>
+            </a:r>
+            <a:endParaRPr lang="en-US" sz="1500" dirty="0"/>
+          </a:p>
+        </p:txBody>
+      </p:sp>
+      <p:sp>
+        <p:nvSpPr>
+          <p:cNvPr id="8" name="Number"/>
           <p:cNvSpPr/>
           <p:nvPr/>
         </p:nvSpPr>
         <p:spPr>
           <a:xfrm>
-            <a:off x="3390824" y="1691640"/>
-            <a:ext cx="2567864" cy="1691640"/>
-          </a:xfrm>
-          <a:prstGeom prst="roundRect">
-            <a:avLst>
-              <a:gd name="adj" fmla="val 4324"/>
-            </a:avLst>
+            <a:off x="548640" y="2633472"/>
+            <a:ext cx="566928" cy="566928"/>
+          </a:xfrm>
+          <a:prstGeom prst="ellipse">
+            <a:avLst/>
           </a:prstGeom>
           <a:solidFill>
-            <a:schemeClr val="bg2"/>
+            <a:schemeClr val="accent1"/>
           </a:solidFill>
-          <a:ln w="9525">
+          <a:ln w="6350">
             <a:solidFill>
-              <a:srgbClr val="C4CBD8"/>
+              <a:schemeClr val="accent1"/>
             </a:solidFill>
             <a:prstDash val="solid"/>
           </a:ln>
@@ -16039,14 +16457,14 @@
       </p:sp>
       <p:sp>
         <p:nvSpPr>
-          <p:cNvPr id="9" name="Stat value"/>
+          <p:cNvPr id="9" name="Text 6"/>
           <p:cNvSpPr txBox="1"/>
           <p:nvPr/>
         </p:nvSpPr>
         <p:spPr>
           <a:xfrm>
-            <a:off x="3527984" y="1801368"/>
-            <a:ext cx="2293544" cy="914400"/>
+            <a:off x="548640" y="2633472"/>
+            <a:ext cx="566928" cy="566928"/>
           </a:xfrm>
           <a:prstGeom prst="rect">
             <a:avLst/>
@@ -16062,30 +16480,30 @@
               <a:buNone/>
             </a:pPr>
             <a:r>
-              <a:rPr lang="en-US" sz="4400" b="1" dirty="0">
-                <a:solidFill>
-                  <a:schemeClr val="tx1"/>
-                </a:solidFill>
-                <a:latin typeface="Cambria" pitchFamily="34" charset="0"/>
-                <a:ea typeface="Cambria" pitchFamily="34" charset="-122"/>
-                <a:cs typeface="Cambria" pitchFamily="34" charset="-120"/>
-              </a:rPr>
-              <a:t>105</a:t>
-            </a:r>
-            <a:endParaRPr lang="en-US" sz="4400" dirty="0"/>
-          </a:p>
-        </p:txBody>
-      </p:sp>
-      <p:sp>
-        <p:nvSpPr>
-          <p:cNvPr id="10" name="Stat label"/>
+              <a:rPr lang="en-US" sz="1500" b="1" dirty="0">
+                <a:solidFill>
+                  <a:schemeClr val="bg1"/>
+                </a:solidFill>
+                <a:latin typeface="Calibri" pitchFamily="34" charset="0"/>
+                <a:ea typeface="Calibri" pitchFamily="34" charset="-122"/>
+                <a:cs typeface="Calibri" pitchFamily="34" charset="-120"/>
+              </a:rPr>
+              <a:t>2</a:t>
+            </a:r>
+            <a:endParaRPr lang="en-US" sz="1500" dirty="0"/>
+          </a:p>
+        </p:txBody>
+      </p:sp>
+      <p:sp>
+        <p:nvSpPr>
+          <p:cNvPr id="10" name="Row text"/>
           <p:cNvSpPr txBox="1"/>
           <p:nvPr/>
         </p:nvSpPr>
         <p:spPr>
           <a:xfrm>
-            <a:off x="3527984" y="2697480"/>
-            <a:ext cx="2293544" cy="612648"/>
+            <a:off x="1325880" y="2587752"/>
+            <a:ext cx="10317175" cy="841248"/>
           </a:xfrm>
           <a:prstGeom prst="rect">
             <a:avLst/>
@@ -16094,46 +16512,44 @@
           <a:ln/>
         </p:spPr>
         <p:txBody>
-          <a:bodyPr wrap="square" lIns="0" tIns="0" rIns="0" bIns="0" rtlCol="0" anchor="t"/>
-          <a:lstStyle/>
-          <a:p>
-            <a:pPr algn="ctr" indent="0" marL="0">
+          <a:bodyPr wrap="square" lIns="0" tIns="0" rIns="0" bIns="0" rtlCol="0" anchor="ctr"/>
+          <a:lstStyle/>
+          <a:p>
+            <a:pPr indent="0" marL="0">
               <a:buNone/>
             </a:pPr>
             <a:r>
-              <a:rPr lang="en-US" sz="1400" dirty="0">
-                <a:solidFill>
-                  <a:schemeClr val="tx2"/>
-                </a:solidFill>
-              </a:rPr>
-              <a:t>workbook checks against the engine, ALL PASS</a:t>
-            </a:r>
-            <a:endParaRPr lang="en-US" sz="1400" dirty="0"/>
-          </a:p>
-        </p:txBody>
-      </p:sp>
-      <p:sp>
-        <p:nvSpPr>
-          <p:cNvPr id="11" name="Stat card"/>
+              <a:rPr lang="en-US" sz="1500" dirty="0">
+                <a:solidFill>
+                  <a:schemeClr val="tx1"/>
+                </a:solidFill>
+              </a:rPr>
+              <a:t>Divergence balls reweight the law's futures. Their dual form is the entropic criterion with a tuned multiplier, and their worst chance is a formula, so a ball's appetite is a smaller appetite under the law.</a:t>
+            </a:r>
+            <a:endParaRPr lang="en-US" sz="1500" dirty="0"/>
+          </a:p>
+        </p:txBody>
+      </p:sp>
+      <p:sp>
+        <p:nvSpPr>
+          <p:cNvPr id="11" name="Number"/>
           <p:cNvSpPr/>
           <p:nvPr/>
         </p:nvSpPr>
         <p:spPr>
           <a:xfrm>
-            <a:off x="6233008" y="1691640"/>
-            <a:ext cx="2567864" cy="1691640"/>
-          </a:xfrm>
-          <a:prstGeom prst="roundRect">
-            <a:avLst>
-              <a:gd name="adj" fmla="val 4324"/>
-            </a:avLst>
+            <a:off x="548640" y="3529584"/>
+            <a:ext cx="566928" cy="566928"/>
+          </a:xfrm>
+          <a:prstGeom prst="ellipse">
+            <a:avLst/>
           </a:prstGeom>
           <a:solidFill>
-            <a:schemeClr val="bg2"/>
+            <a:schemeClr val="accent1"/>
           </a:solidFill>
-          <a:ln w="9525">
+          <a:ln w="6350">
             <a:solidFill>
-              <a:srgbClr val="C4CBD8"/>
+              <a:schemeClr val="accent1"/>
             </a:solidFill>
             <a:prstDash val="solid"/>
           </a:ln>
@@ -16141,14 +16557,14 @@
       </p:sp>
       <p:sp>
         <p:nvSpPr>
-          <p:cNvPr id="12" name="Stat value"/>
+          <p:cNvPr id="12" name="Text 9"/>
           <p:cNvSpPr txBox="1"/>
           <p:nvPr/>
         </p:nvSpPr>
         <p:spPr>
           <a:xfrm>
-            <a:off x="6370168" y="1801368"/>
-            <a:ext cx="2293544" cy="914400"/>
+            <a:off x="548640" y="3529584"/>
+            <a:ext cx="566928" cy="566928"/>
           </a:xfrm>
           <a:prstGeom prst="rect">
             <a:avLst/>
@@ -16164,30 +16580,30 @@
               <a:buNone/>
             </a:pPr>
             <a:r>
-              <a:rPr lang="en-US" sz="4400" b="1" dirty="0">
-                <a:solidFill>
-                  <a:schemeClr val="tx1"/>
-                </a:solidFill>
-                <a:latin typeface="Cambria" pitchFamily="34" charset="0"/>
-                <a:ea typeface="Cambria" pitchFamily="34" charset="-122"/>
-                <a:cs typeface="Cambria" pitchFamily="34" charset="-120"/>
-              </a:rPr>
-              <a:t>26211</a:t>
-            </a:r>
-            <a:endParaRPr lang="en-US" sz="4400" dirty="0"/>
-          </a:p>
-        </p:txBody>
-      </p:sp>
-      <p:sp>
-        <p:nvSpPr>
-          <p:cNvPr id="13" name="Stat label"/>
+              <a:rPr lang="en-US" sz="1500" b="1" dirty="0">
+                <a:solidFill>
+                  <a:schemeClr val="bg1"/>
+                </a:solidFill>
+                <a:latin typeface="Calibri" pitchFamily="34" charset="0"/>
+                <a:ea typeface="Calibri" pitchFamily="34" charset="-122"/>
+                <a:cs typeface="Calibri" pitchFamily="34" charset="-120"/>
+              </a:rPr>
+              <a:t>3</a:t>
+            </a:r>
+            <a:endParaRPr lang="en-US" sz="1500" dirty="0"/>
+          </a:p>
+        </p:txBody>
+      </p:sp>
+      <p:sp>
+        <p:nvSpPr>
+          <p:cNvPr id="13" name="Row text"/>
           <p:cNvSpPr txBox="1"/>
           <p:nvPr/>
         </p:nvSpPr>
         <p:spPr>
           <a:xfrm>
-            <a:off x="6370168" y="2697480"/>
-            <a:ext cx="2293544" cy="612648"/>
+            <a:off x="1325880" y="3483864"/>
+            <a:ext cx="10317175" cy="841248"/>
           </a:xfrm>
           <a:prstGeom prst="rect">
             <a:avLst/>
@@ -16196,46 +16612,44 @@
           <a:ln/>
         </p:spPr>
         <p:txBody>
-          <a:bodyPr wrap="square" lIns="0" tIns="0" rIns="0" bIns="0" rtlCol="0" anchor="t"/>
-          <a:lstStyle/>
-          <a:p>
-            <a:pPr algn="ctr" indent="0" marL="0">
+          <a:bodyPr wrap="square" lIns="0" tIns="0" rIns="0" bIns="0" rtlCol="0" anchor="ctr"/>
+          <a:lstStyle/>
+          <a:p>
+            <a:pPr indent="0" marL="0">
               <a:buNone/>
             </a:pPr>
             <a:r>
-              <a:rPr lang="en-US" sz="1400" dirty="0">
-                <a:solidFill>
-                  <a:schemeClr val="tx2"/>
-                </a:solidFill>
-              </a:rPr>
-              <a:t>the lab's seed</a:t>
-            </a:r>
-            <a:endParaRPr lang="en-US" sz="1400" dirty="0"/>
-          </a:p>
-        </p:txBody>
-      </p:sp>
-      <p:sp>
-        <p:nvSpPr>
-          <p:cNvPr id="14" name="Stat card"/>
+              <a:rPr lang="en-US" sz="1500" dirty="0">
+                <a:solidFill>
+                  <a:schemeClr val="tx1"/>
+                </a:solidFill>
+              </a:rPr>
+              <a:t>Wasserstein balls move futures. Their dual form adds a Lipschitz premium, and keeping a chance means the futures nearest a breach must keep an average margin; their radius suits a record's sampling error.</a:t>
+            </a:r>
+            <a:endParaRPr lang="en-US" sz="1500" dirty="0"/>
+          </a:p>
+        </p:txBody>
+      </p:sp>
+      <p:sp>
+        <p:nvSpPr>
+          <p:cNvPr id="14" name="Number"/>
           <p:cNvSpPr/>
           <p:nvPr/>
         </p:nvSpPr>
         <p:spPr>
           <a:xfrm>
-            <a:off x="9075191" y="1691640"/>
-            <a:ext cx="2567864" cy="1691640"/>
-          </a:xfrm>
-          <a:prstGeom prst="roundRect">
-            <a:avLst>
-              <a:gd name="adj" fmla="val 4324"/>
-            </a:avLst>
+            <a:off x="548640" y="4425696"/>
+            <a:ext cx="566928" cy="566928"/>
+          </a:xfrm>
+          <a:prstGeom prst="ellipse">
+            <a:avLst/>
           </a:prstGeom>
           <a:solidFill>
-            <a:schemeClr val="bg2"/>
+            <a:schemeClr val="accent1"/>
           </a:solidFill>
-          <a:ln w="9525">
+          <a:ln w="6350">
             <a:solidFill>
-              <a:srgbClr val="C4CBD8"/>
+              <a:schemeClr val="accent1"/>
             </a:solidFill>
             <a:prstDash val="solid"/>
           </a:ln>
@@ -16243,14 +16657,14 @@
       </p:sp>
       <p:sp>
         <p:nvSpPr>
-          <p:cNvPr id="15" name="Stat value"/>
+          <p:cNvPr id="15" name="Text 12"/>
           <p:cNvSpPr txBox="1"/>
           <p:nvPr/>
         </p:nvSpPr>
         <p:spPr>
           <a:xfrm>
-            <a:off x="9212351" y="1801368"/>
-            <a:ext cx="2293544" cy="914400"/>
+            <a:off x="548640" y="4425696"/>
+            <a:ext cx="566928" cy="566928"/>
           </a:xfrm>
           <a:prstGeom prst="rect">
             <a:avLst/>
@@ -16266,30 +16680,30 @@
               <a:buNone/>
             </a:pPr>
             <a:r>
-              <a:rPr lang="en-US" sz="3000" b="1" dirty="0">
-                <a:solidFill>
-                  <a:schemeClr val="tx1"/>
-                </a:solidFill>
-                <a:latin typeface="Cambria" pitchFamily="34" charset="0"/>
-                <a:ea typeface="Cambria" pitchFamily="34" charset="-122"/>
-                <a:cs typeface="Cambria" pitchFamily="34" charset="-120"/>
-              </a:rPr>
-              <a:t>AXIOM-11</a:t>
-            </a:r>
-            <a:endParaRPr lang="en-US" sz="3000" dirty="0"/>
-          </a:p>
-        </p:txBody>
-      </p:sp>
-      <p:sp>
-        <p:nvSpPr>
-          <p:cNvPr id="16" name="Stat label"/>
+              <a:rPr lang="en-US" sz="1500" b="1" dirty="0">
+                <a:solidFill>
+                  <a:schemeClr val="bg1"/>
+                </a:solidFill>
+                <a:latin typeface="Calibri" pitchFamily="34" charset="0"/>
+                <a:ea typeface="Calibri" pitchFamily="34" charset="-122"/>
+                <a:cs typeface="Calibri" pitchFamily="34" charset="-120"/>
+              </a:rPr>
+              <a:t>4</a:t>
+            </a:r>
+            <a:endParaRPr lang="en-US" sz="1500" dirty="0"/>
+          </a:p>
+        </p:txBody>
+      </p:sp>
+      <p:sp>
+        <p:nvSpPr>
+          <p:cNvPr id="16" name="Row text"/>
           <p:cNvSpPr txBox="1"/>
           <p:nvPr/>
         </p:nvSpPr>
         <p:spPr>
           <a:xfrm>
-            <a:off x="9212351" y="2697480"/>
-            <a:ext cx="2293544" cy="612648"/>
+            <a:off x="1325880" y="4379976"/>
+            <a:ext cx="10317175" cy="841248"/>
           </a:xfrm>
           <a:prstGeom prst="rect">
             <a:avLst/>
@@ -16298,34 +16712,98 @@
           <a:ln/>
         </p:spPr>
         <p:txBody>
-          <a:bodyPr wrap="square" lIns="0" tIns="0" rIns="0" bIns="0" rtlCol="0" anchor="t"/>
+          <a:bodyPr wrap="square" lIns="0" tIns="0" rIns="0" bIns="0" rtlCol="0" anchor="ctr"/>
+          <a:lstStyle/>
+          <a:p>
+            <a:pPr indent="0" marL="0">
+              <a:buNone/>
+            </a:pPr>
+            <a:r>
+              <a:rPr lang="en-US" sz="1500" dirty="0">
+                <a:solidFill>
+                  <a:schemeClr val="tx1"/>
+                </a:solidFill>
+              </a:rPr>
+              <a:t>Moment families fear lumps: a two-point law attains Cantelli's bound, so averages alone ask for 4.36 spreads of margin at 5 percent.</a:t>
+            </a:r>
+            <a:endParaRPr lang="en-US" sz="1500" dirty="0"/>
+          </a:p>
+        </p:txBody>
+      </p:sp>
+      <p:sp>
+        <p:nvSpPr>
+          <p:cNvPr id="17" name="Number"/>
+          <p:cNvSpPr/>
+          <p:nvPr/>
+        </p:nvSpPr>
+        <p:spPr>
+          <a:xfrm>
+            <a:off x="548640" y="5321808"/>
+            <a:ext cx="566928" cy="566928"/>
+          </a:xfrm>
+          <a:prstGeom prst="ellipse">
+            <a:avLst/>
+          </a:prstGeom>
+          <a:solidFill>
+            <a:schemeClr val="accent1"/>
+          </a:solidFill>
+          <a:ln w="6350">
+            <a:solidFill>
+              <a:schemeClr val="accent1"/>
+            </a:solidFill>
+            <a:prstDash val="solid"/>
+          </a:ln>
+        </p:spPr>
+      </p:sp>
+      <p:sp>
+        <p:nvSpPr>
+          <p:cNvPr id="18" name="Text 15"/>
+          <p:cNvSpPr txBox="1"/>
+          <p:nvPr/>
+        </p:nvSpPr>
+        <p:spPr>
+          <a:xfrm>
+            <a:off x="548640" y="5321808"/>
+            <a:ext cx="566928" cy="566928"/>
+          </a:xfrm>
+          <a:prstGeom prst="rect">
+            <a:avLst/>
+          </a:prstGeom>
+          <a:noFill/>
+          <a:ln/>
+        </p:spPr>
+        <p:txBody>
+          <a:bodyPr wrap="square" lIns="0" tIns="0" rIns="0" bIns="0" rtlCol="0" anchor="ctr"/>
           <a:lstStyle/>
           <a:p>
             <a:pPr algn="ctr" indent="0" marL="0">
               <a:buNone/>
             </a:pPr>
             <a:r>
-              <a:rPr lang="en-US" sz="1400" dirty="0">
-                <a:solidFill>
-                  <a:schemeClr val="tx2"/>
-                </a:solidFill>
-              </a:rPr>
-              <a:t>AXIOM Lab 2.11</a:t>
-            </a:r>
-            <a:endParaRPr lang="en-US" sz="1400" dirty="0"/>
-          </a:p>
-        </p:txBody>
-      </p:sp>
-      <p:sp>
-        <p:nvSpPr>
-          <p:cNvPr id="17" name="Bullets"/>
+              <a:rPr lang="en-US" sz="1500" b="1" dirty="0">
+                <a:solidFill>
+                  <a:schemeClr val="bg1"/>
+                </a:solidFill>
+                <a:latin typeface="Calibri" pitchFamily="34" charset="0"/>
+                <a:ea typeface="Calibri" pitchFamily="34" charset="-122"/>
+                <a:cs typeface="Calibri" pitchFamily="34" charset="-120"/>
+              </a:rPr>
+              <a:t>5</a:t>
+            </a:r>
+            <a:endParaRPr lang="en-US" sz="1500" dirty="0"/>
+          </a:p>
+        </p:txBody>
+      </p:sp>
+      <p:sp>
+        <p:nvSpPr>
+          <p:cNvPr id="19" name="Row text"/>
           <p:cNvSpPr txBox="1"/>
           <p:nvPr/>
         </p:nvSpPr>
         <p:spPr>
           <a:xfrm>
-            <a:off x="548640" y="3703320"/>
-            <a:ext cx="11094415" cy="2468880"/>
+            <a:off x="1325880" y="5276088"/>
+            <a:ext cx="10317175" cy="841248"/>
           </a:xfrm>
           <a:prstGeom prst="rect">
             <a:avLst/>
@@ -16334,59 +16812,21 @@
           <a:ln/>
         </p:spPr>
         <p:txBody>
-          <a:bodyPr wrap="square" lIns="635" tIns="635" rIns="635" bIns="635" rtlCol="0" anchor="t"/>
-          <a:lstStyle/>
-          <a:p>
-            <a:pPr marL="228600" indent="-228600">
-              <a:spcAft>
-                <a:spcPts val="800"/>
-              </a:spcAft>
-              <a:buSzPct val="100000"/>
-              <a:buChar char="•"/>
-            </a:pPr>
-            <a:r>
-              <a:rPr lang="en-US" sz="1700" b="1" dirty="0">
+          <a:bodyPr wrap="square" lIns="0" tIns="0" rIns="0" bIns="0" rtlCol="0" anchor="ctr"/>
+          <a:lstStyle/>
+          <a:p>
+            <a:pPr indent="0" marL="0">
+              <a:buNone/>
+            </a:pPr>
+            <a:r>
+              <a:rPr lang="en-US" sz="1500" dirty="0">
                 <a:solidFill>
                   <a:schemeClr val="tx1"/>
                 </a:solidFill>
               </a:rPr>
-              <a:t>Notebook</a:t>
-            </a:r>
-            <a:r>
-              <a:rPr lang="en-US" sz="1700" dirty="0">
-                <a:solidFill>
-                  <a:schemeClr val="tx1"/>
-                </a:solidFill>
-              </a:rPr>
-              <a:t> DCT_V2_Ch11_Lab.ipynb: Worked Example 11.1 and the lab's five steps in seven panels, on the book's paths and the fresh ones</a:t>
-            </a:r>
-            <a:endParaRPr lang="en-US" sz="1700" dirty="0"/>
-          </a:p>
-          <a:p>
-            <a:pPr marL="228600" indent="-228600">
-              <a:spcAft>
-                <a:spcPts val="800"/>
-              </a:spcAft>
-              <a:buSzPct val="100000"/>
-              <a:buChar char="•"/>
-            </a:pPr>
-            <a:r>
-              <a:rPr lang="en-US" sz="1700" b="1" dirty="0">
-                <a:solidFill>
-                  <a:schemeClr val="tx1"/>
-                </a:solidFill>
-              </a:rPr>
-              <a:t>Workbook</a:t>
-            </a:r>
-            <a:r>
-              <a:rPr lang="en-US" sz="1700" dirty="0">
-                <a:solidFill>
-                  <a:schemeClr val="tx1"/>
-                </a:solidFill>
-              </a:rPr>
-              <a:t> DCT_V2_Ch11_Lab.xlsx: the records' bounds, the radii, the law's appetite by bisection, Cantelli's bounds, the price of ambiguity and Table 11.3, in formulas</a:t>
-            </a:r>
-            <a:endParaRPr lang="en-US" sz="1700" dirty="0"/>
+              <a:t>Records declare the family: confidence bounds for counts and spreads, their corner, and families over time declared stage by stage (Propositions 11.2–11.3; Table 11.2). For Meridian, the doubt costs $13.56 million, mostly the spread's.</a:t>
+            </a:r>
+            <a:endParaRPr lang="en-US" sz="1500" dirty="0"/>
           </a:p>
         </p:txBody>
       </p:sp>
@@ -16492,6 +16932,637 @@
                   <a:schemeClr val="accent1"/>
                 </a:solidFill>
               </a:rPr>
+              <a:t>THIS WEEK'S LABORATORY</a:t>
+            </a:r>
+            <a:endParaRPr lang="en-US" sz="1200" dirty="0"/>
+          </a:p>
+        </p:txBody>
+      </p:sp>
+      <p:sp>
+        <p:nvSpPr>
+          <p:cNvPr id="4" name="Text 1"/>
+          <p:cNvSpPr/>
+          <p:nvPr>
+            <p:ph idx="103" type="title" hasCustomPrompt="1"/>
+          </p:nvPr>
+        </p:nvSpPr>
+        <p:spPr>
+          <a:xfrm>
+            <a:off x="548640" y="658368"/>
+            <a:ext cx="11094415" cy="868680"/>
+          </a:xfrm>
+          <a:prstGeom prst="rect">
+            <a:avLst/>
+          </a:prstGeom>
+          <a:noFill/>
+          <a:ln/>
+        </p:spPr>
+        <p:txBody>
+          <a:bodyPr wrap="square" lIns="0" tIns="0" rIns="0" bIns="0" rtlCol="0" anchor="t"/>
+          <a:lstStyle/>
+          <a:p>
+            <a:pPr algn="l" indent="0" marL="0">
+              <a:buNone/>
+            </a:pPr>
+            <a:r>
+              <a:rPr lang="en-US" sz="3200" b="1" dirty="0">
+                <a:solidFill>
+                  <a:schemeClr val="tx1"/>
+                </a:solidFill>
+                <a:latin typeface="Cambria" pitchFamily="34" charset="0"/>
+                <a:ea typeface="Cambria" pitchFamily="34" charset="-122"/>
+                <a:cs typeface="Cambria" pitchFamily="34" charset="-120"/>
+              </a:rPr>
+              <a:t>Notebook and workbook reproduce the book</a:t>
+            </a:r>
+            <a:endParaRPr lang="en-US" sz="3200" dirty="0"/>
+          </a:p>
+        </p:txBody>
+      </p:sp>
+      <p:sp>
+        <p:nvSpPr>
+          <p:cNvPr id="5" name="Stat card"/>
+          <p:cNvSpPr/>
+          <p:nvPr/>
+        </p:nvSpPr>
+        <p:spPr>
+          <a:xfrm>
+            <a:off x="548640" y="1691640"/>
+            <a:ext cx="2567864" cy="1691640"/>
+          </a:xfrm>
+          <a:prstGeom prst="roundRect">
+            <a:avLst>
+              <a:gd name="adj" fmla="val 4324"/>
+            </a:avLst>
+          </a:prstGeom>
+          <a:solidFill>
+            <a:schemeClr val="tx1"/>
+          </a:solidFill>
+          <a:ln w="9525">
+            <a:solidFill>
+              <a:srgbClr val="0F1E3D"/>
+            </a:solidFill>
+            <a:prstDash val="solid"/>
+          </a:ln>
+        </p:spPr>
+      </p:sp>
+      <p:sp>
+        <p:nvSpPr>
+          <p:cNvPr id="6" name="Stat value"/>
+          <p:cNvSpPr txBox="1"/>
+          <p:nvPr/>
+        </p:nvSpPr>
+        <p:spPr>
+          <a:xfrm>
+            <a:off x="685800" y="1801368"/>
+            <a:ext cx="2293544" cy="914400"/>
+          </a:xfrm>
+          <a:prstGeom prst="rect">
+            <a:avLst/>
+          </a:prstGeom>
+          <a:noFill/>
+          <a:ln/>
+        </p:spPr>
+        <p:txBody>
+          <a:bodyPr wrap="square" lIns="0" tIns="0" rIns="0" bIns="0" rtlCol="0" anchor="ctr"/>
+          <a:lstStyle/>
+          <a:p>
+            <a:pPr algn="ctr" indent="0" marL="0">
+              <a:buNone/>
+            </a:pPr>
+            <a:r>
+              <a:rPr lang="en-US" sz="4400" b="1" dirty="0">
+                <a:solidFill>
+                  <a:schemeClr val="accent1"/>
+                </a:solidFill>
+                <a:latin typeface="Cambria" pitchFamily="34" charset="0"/>
+                <a:ea typeface="Cambria" pitchFamily="34" charset="-122"/>
+                <a:cs typeface="Cambria" pitchFamily="34" charset="-120"/>
+              </a:rPr>
+              <a:t>358</a:t>
+            </a:r>
+            <a:endParaRPr lang="en-US" sz="4400" dirty="0"/>
+          </a:p>
+        </p:txBody>
+      </p:sp>
+      <p:sp>
+        <p:nvSpPr>
+          <p:cNvPr id="7" name="Stat label"/>
+          <p:cNvSpPr txBox="1"/>
+          <p:nvPr/>
+        </p:nvSpPr>
+        <p:spPr>
+          <a:xfrm>
+            <a:off x="685800" y="2697480"/>
+            <a:ext cx="2293544" cy="612648"/>
+          </a:xfrm>
+          <a:prstGeom prst="rect">
+            <a:avLst/>
+          </a:prstGeom>
+          <a:noFill/>
+          <a:ln/>
+        </p:spPr>
+        <p:txBody>
+          <a:bodyPr wrap="square" lIns="0" tIns="0" rIns="0" bIns="0" rtlCol="0" anchor="t"/>
+          <a:lstStyle/>
+          <a:p>
+            <a:pPr algn="ctr" indent="0" marL="0">
+              <a:buNone/>
+            </a:pPr>
+            <a:r>
+              <a:rPr lang="en-US" sz="1400" dirty="0">
+                <a:solidFill>
+                  <a:schemeClr val="bg2"/>
+                </a:solidFill>
+              </a:rPr>
+              <a:t>notebook checkpoints, every one PASS</a:t>
+            </a:r>
+            <a:endParaRPr lang="en-US" sz="1400" dirty="0"/>
+          </a:p>
+        </p:txBody>
+      </p:sp>
+      <p:sp>
+        <p:nvSpPr>
+          <p:cNvPr id="8" name="Stat card"/>
+          <p:cNvSpPr/>
+          <p:nvPr/>
+        </p:nvSpPr>
+        <p:spPr>
+          <a:xfrm>
+            <a:off x="3390824" y="1691640"/>
+            <a:ext cx="2567864" cy="1691640"/>
+          </a:xfrm>
+          <a:prstGeom prst="roundRect">
+            <a:avLst>
+              <a:gd name="adj" fmla="val 4324"/>
+            </a:avLst>
+          </a:prstGeom>
+          <a:solidFill>
+            <a:schemeClr val="bg2"/>
+          </a:solidFill>
+          <a:ln w="9525">
+            <a:solidFill>
+              <a:srgbClr val="C4CBD8"/>
+            </a:solidFill>
+            <a:prstDash val="solid"/>
+          </a:ln>
+        </p:spPr>
+      </p:sp>
+      <p:sp>
+        <p:nvSpPr>
+          <p:cNvPr id="9" name="Stat value"/>
+          <p:cNvSpPr txBox="1"/>
+          <p:nvPr/>
+        </p:nvSpPr>
+        <p:spPr>
+          <a:xfrm>
+            <a:off x="3527984" y="1801368"/>
+            <a:ext cx="2293544" cy="914400"/>
+          </a:xfrm>
+          <a:prstGeom prst="rect">
+            <a:avLst/>
+          </a:prstGeom>
+          <a:noFill/>
+          <a:ln/>
+        </p:spPr>
+        <p:txBody>
+          <a:bodyPr wrap="square" lIns="0" tIns="0" rIns="0" bIns="0" rtlCol="0" anchor="ctr"/>
+          <a:lstStyle/>
+          <a:p>
+            <a:pPr algn="ctr" indent="0" marL="0">
+              <a:buNone/>
+            </a:pPr>
+            <a:r>
+              <a:rPr lang="en-US" sz="4400" b="1" dirty="0">
+                <a:solidFill>
+                  <a:schemeClr val="tx1"/>
+                </a:solidFill>
+                <a:latin typeface="Cambria" pitchFamily="34" charset="0"/>
+                <a:ea typeface="Cambria" pitchFamily="34" charset="-122"/>
+                <a:cs typeface="Cambria" pitchFamily="34" charset="-120"/>
+              </a:rPr>
+              <a:t>105</a:t>
+            </a:r>
+            <a:endParaRPr lang="en-US" sz="4400" dirty="0"/>
+          </a:p>
+        </p:txBody>
+      </p:sp>
+      <p:sp>
+        <p:nvSpPr>
+          <p:cNvPr id="10" name="Stat label"/>
+          <p:cNvSpPr txBox="1"/>
+          <p:nvPr/>
+        </p:nvSpPr>
+        <p:spPr>
+          <a:xfrm>
+            <a:off x="3527984" y="2697480"/>
+            <a:ext cx="2293544" cy="612648"/>
+          </a:xfrm>
+          <a:prstGeom prst="rect">
+            <a:avLst/>
+          </a:prstGeom>
+          <a:noFill/>
+          <a:ln/>
+        </p:spPr>
+        <p:txBody>
+          <a:bodyPr wrap="square" lIns="0" tIns="0" rIns="0" bIns="0" rtlCol="0" anchor="t"/>
+          <a:lstStyle/>
+          <a:p>
+            <a:pPr algn="ctr" indent="0" marL="0">
+              <a:buNone/>
+            </a:pPr>
+            <a:r>
+              <a:rPr lang="en-US" sz="1400" dirty="0">
+                <a:solidFill>
+                  <a:schemeClr val="tx2"/>
+                </a:solidFill>
+              </a:rPr>
+              <a:t>workbook checks against the engine, ALL PASS</a:t>
+            </a:r>
+            <a:endParaRPr lang="en-US" sz="1400" dirty="0"/>
+          </a:p>
+        </p:txBody>
+      </p:sp>
+      <p:sp>
+        <p:nvSpPr>
+          <p:cNvPr id="11" name="Stat card"/>
+          <p:cNvSpPr/>
+          <p:nvPr/>
+        </p:nvSpPr>
+        <p:spPr>
+          <a:xfrm>
+            <a:off x="6233008" y="1691640"/>
+            <a:ext cx="2567864" cy="1691640"/>
+          </a:xfrm>
+          <a:prstGeom prst="roundRect">
+            <a:avLst>
+              <a:gd name="adj" fmla="val 4324"/>
+            </a:avLst>
+          </a:prstGeom>
+          <a:solidFill>
+            <a:schemeClr val="bg2"/>
+          </a:solidFill>
+          <a:ln w="9525">
+            <a:solidFill>
+              <a:srgbClr val="C4CBD8"/>
+            </a:solidFill>
+            <a:prstDash val="solid"/>
+          </a:ln>
+        </p:spPr>
+      </p:sp>
+      <p:sp>
+        <p:nvSpPr>
+          <p:cNvPr id="12" name="Stat value"/>
+          <p:cNvSpPr txBox="1"/>
+          <p:nvPr/>
+        </p:nvSpPr>
+        <p:spPr>
+          <a:xfrm>
+            <a:off x="6370168" y="1801368"/>
+            <a:ext cx="2293544" cy="914400"/>
+          </a:xfrm>
+          <a:prstGeom prst="rect">
+            <a:avLst/>
+          </a:prstGeom>
+          <a:noFill/>
+          <a:ln/>
+        </p:spPr>
+        <p:txBody>
+          <a:bodyPr wrap="square" lIns="0" tIns="0" rIns="0" bIns="0" rtlCol="0" anchor="ctr"/>
+          <a:lstStyle/>
+          <a:p>
+            <a:pPr algn="ctr" indent="0" marL="0">
+              <a:buNone/>
+            </a:pPr>
+            <a:r>
+              <a:rPr lang="en-US" sz="4400" b="1" dirty="0">
+                <a:solidFill>
+                  <a:schemeClr val="tx1"/>
+                </a:solidFill>
+                <a:latin typeface="Cambria" pitchFamily="34" charset="0"/>
+                <a:ea typeface="Cambria" pitchFamily="34" charset="-122"/>
+                <a:cs typeface="Cambria" pitchFamily="34" charset="-120"/>
+              </a:rPr>
+              <a:t>26211</a:t>
+            </a:r>
+            <a:endParaRPr lang="en-US" sz="4400" dirty="0"/>
+          </a:p>
+        </p:txBody>
+      </p:sp>
+      <p:sp>
+        <p:nvSpPr>
+          <p:cNvPr id="13" name="Stat label"/>
+          <p:cNvSpPr txBox="1"/>
+          <p:nvPr/>
+        </p:nvSpPr>
+        <p:spPr>
+          <a:xfrm>
+            <a:off x="6370168" y="2697480"/>
+            <a:ext cx="2293544" cy="612648"/>
+          </a:xfrm>
+          <a:prstGeom prst="rect">
+            <a:avLst/>
+          </a:prstGeom>
+          <a:noFill/>
+          <a:ln/>
+        </p:spPr>
+        <p:txBody>
+          <a:bodyPr wrap="square" lIns="0" tIns="0" rIns="0" bIns="0" rtlCol="0" anchor="t"/>
+          <a:lstStyle/>
+          <a:p>
+            <a:pPr algn="ctr" indent="0" marL="0">
+              <a:buNone/>
+            </a:pPr>
+            <a:r>
+              <a:rPr lang="en-US" sz="1400" dirty="0">
+                <a:solidFill>
+                  <a:schemeClr val="tx2"/>
+                </a:solidFill>
+              </a:rPr>
+              <a:t>the lab's seed</a:t>
+            </a:r>
+            <a:endParaRPr lang="en-US" sz="1400" dirty="0"/>
+          </a:p>
+        </p:txBody>
+      </p:sp>
+      <p:sp>
+        <p:nvSpPr>
+          <p:cNvPr id="14" name="Stat card"/>
+          <p:cNvSpPr/>
+          <p:nvPr/>
+        </p:nvSpPr>
+        <p:spPr>
+          <a:xfrm>
+            <a:off x="9075191" y="1691640"/>
+            <a:ext cx="2567864" cy="1691640"/>
+          </a:xfrm>
+          <a:prstGeom prst="roundRect">
+            <a:avLst>
+              <a:gd name="adj" fmla="val 4324"/>
+            </a:avLst>
+          </a:prstGeom>
+          <a:solidFill>
+            <a:schemeClr val="bg2"/>
+          </a:solidFill>
+          <a:ln w="9525">
+            <a:solidFill>
+              <a:srgbClr val="C4CBD8"/>
+            </a:solidFill>
+            <a:prstDash val="solid"/>
+          </a:ln>
+        </p:spPr>
+      </p:sp>
+      <p:sp>
+        <p:nvSpPr>
+          <p:cNvPr id="15" name="Stat value"/>
+          <p:cNvSpPr txBox="1"/>
+          <p:nvPr/>
+        </p:nvSpPr>
+        <p:spPr>
+          <a:xfrm>
+            <a:off x="9212351" y="1801368"/>
+            <a:ext cx="2293544" cy="914400"/>
+          </a:xfrm>
+          <a:prstGeom prst="rect">
+            <a:avLst/>
+          </a:prstGeom>
+          <a:noFill/>
+          <a:ln/>
+        </p:spPr>
+        <p:txBody>
+          <a:bodyPr wrap="square" lIns="0" tIns="0" rIns="0" bIns="0" rtlCol="0" anchor="ctr"/>
+          <a:lstStyle/>
+          <a:p>
+            <a:pPr algn="ctr" indent="0" marL="0">
+              <a:buNone/>
+            </a:pPr>
+            <a:r>
+              <a:rPr lang="en-US" sz="3000" b="1" dirty="0">
+                <a:solidFill>
+                  <a:schemeClr val="tx1"/>
+                </a:solidFill>
+                <a:latin typeface="Cambria" pitchFamily="34" charset="0"/>
+                <a:ea typeface="Cambria" pitchFamily="34" charset="-122"/>
+                <a:cs typeface="Cambria" pitchFamily="34" charset="-120"/>
+              </a:rPr>
+              <a:t>AXIOM-11</a:t>
+            </a:r>
+            <a:endParaRPr lang="en-US" sz="3000" dirty="0"/>
+          </a:p>
+        </p:txBody>
+      </p:sp>
+      <p:sp>
+        <p:nvSpPr>
+          <p:cNvPr id="16" name="Stat label"/>
+          <p:cNvSpPr txBox="1"/>
+          <p:nvPr/>
+        </p:nvSpPr>
+        <p:spPr>
+          <a:xfrm>
+            <a:off x="9212351" y="2697480"/>
+            <a:ext cx="2293544" cy="612648"/>
+          </a:xfrm>
+          <a:prstGeom prst="rect">
+            <a:avLst/>
+          </a:prstGeom>
+          <a:noFill/>
+          <a:ln/>
+        </p:spPr>
+        <p:txBody>
+          <a:bodyPr wrap="square" lIns="0" tIns="0" rIns="0" bIns="0" rtlCol="0" anchor="t"/>
+          <a:lstStyle/>
+          <a:p>
+            <a:pPr algn="ctr" indent="0" marL="0">
+              <a:buNone/>
+            </a:pPr>
+            <a:r>
+              <a:rPr lang="en-US" sz="1400" dirty="0">
+                <a:solidFill>
+                  <a:schemeClr val="tx2"/>
+                </a:solidFill>
+              </a:rPr>
+              <a:t>AXIOM Lab 2.11</a:t>
+            </a:r>
+            <a:endParaRPr lang="en-US" sz="1400" dirty="0"/>
+          </a:p>
+        </p:txBody>
+      </p:sp>
+      <p:sp>
+        <p:nvSpPr>
+          <p:cNvPr id="17" name="Bullets"/>
+          <p:cNvSpPr txBox="1"/>
+          <p:nvPr/>
+        </p:nvSpPr>
+        <p:spPr>
+          <a:xfrm>
+            <a:off x="548640" y="3703320"/>
+            <a:ext cx="11094415" cy="2468880"/>
+          </a:xfrm>
+          <a:prstGeom prst="rect">
+            <a:avLst/>
+          </a:prstGeom>
+          <a:noFill/>
+          <a:ln/>
+        </p:spPr>
+        <p:txBody>
+          <a:bodyPr wrap="square" lIns="635" tIns="635" rIns="635" bIns="635" rtlCol="0" anchor="t"/>
+          <a:lstStyle/>
+          <a:p>
+            <a:pPr marL="228600" indent="-228600">
+              <a:spcAft>
+                <a:spcPts val="800"/>
+              </a:spcAft>
+              <a:buSzPct val="100000"/>
+              <a:buChar char="•"/>
+            </a:pPr>
+            <a:r>
+              <a:rPr lang="en-US" sz="1700" b="1" dirty="0">
+                <a:solidFill>
+                  <a:schemeClr val="tx1"/>
+                </a:solidFill>
+              </a:rPr>
+              <a:t>Notebook</a:t>
+            </a:r>
+            <a:r>
+              <a:rPr lang="en-US" sz="1700" dirty="0">
+                <a:solidFill>
+                  <a:schemeClr val="tx1"/>
+                </a:solidFill>
+              </a:rPr>
+              <a:t> DCT_V2_Ch11_Lab.ipynb: Worked Example 11.1 and the lab's five steps in seven panels, on the book's paths and the fresh ones</a:t>
+            </a:r>
+            <a:endParaRPr lang="en-US" sz="1700" dirty="0"/>
+          </a:p>
+          <a:p>
+            <a:pPr marL="228600" indent="-228600">
+              <a:spcAft>
+                <a:spcPts val="800"/>
+              </a:spcAft>
+              <a:buSzPct val="100000"/>
+              <a:buChar char="•"/>
+            </a:pPr>
+            <a:r>
+              <a:rPr lang="en-US" sz="1700" b="1" dirty="0">
+                <a:solidFill>
+                  <a:schemeClr val="tx1"/>
+                </a:solidFill>
+              </a:rPr>
+              <a:t>Workbook</a:t>
+            </a:r>
+            <a:r>
+              <a:rPr lang="en-US" sz="1700" dirty="0">
+                <a:solidFill>
+                  <a:schemeClr val="tx1"/>
+                </a:solidFill>
+              </a:rPr>
+              <a:t> DCT_V2_Ch11_Lab.xlsx: the records' bounds, the radii, the law's appetite by bisection, Cantelli's bounds, the price of ambiguity and Table 11.3, in formulas</a:t>
+            </a:r>
+            <a:endParaRPr lang="en-US" sz="1700" dirty="0"/>
+          </a:p>
+        </p:txBody>
+      </p:sp>
+      <p:sp>
+        <p:nvSpPr>
+          <p:cNvPr id="25" name="Slide Number Placeholder 0"/>
+          <p:cNvSpPr>
+            <a:spLocks noGrp="1"/>
+          </p:cNvSpPr>
+          <p:nvPr>
+            <p:ph type="sldNum" sz="quarter" idx="4294967295"/>
+          </p:nvPr>
+        </p:nvSpPr>
+        <p:spPr>
+          <a:xfrm>
+            <a:off x="11094415" y="6382512"/>
+            <a:ext cx="548640" cy="237744"/>
+          </a:xfrm>
+          <a:prstGeom prst="rect">
+            <a:avLst/>
+          </a:prstGeom>
+          <a:extLst>
+            <a:ext uri="{C572A759-6A51-4108-AA02-DFA0A04FC94B}">
+              <ma14:wrappingTextBoxFlag xmlns:ma14="http://schemas.microsoft.com/office/mac/drawingml/2011/main" val="0"/>
+            </a:ext>
+          </a:extLst>
+        </p:spPr>
+        <p:txBody>
+          <a:bodyPr/>
+          <a:lstStyle>
+            <a:lvl1pPr>
+              <a:defRPr sz="1000">
+                <a:solidFill>
+                  <a:srgbClr val="5A6B82"/>
+                </a:solidFill>
+              </a:defRPr>
+            </a:lvl1pPr>
+          </a:lstStyle>
+          <a:p>
+            <a:pPr algn="r"/>
+            <a:fld id="{F7021451-1387-4CA6-816F-3879F97B5CBC}" type="slidenum">
+              <a:rPr b="0" lang="en-US"/>
+              <a:t>22</a:t>
+            </a:fld>
+            <a:endParaRPr lang="en-US"/>
+          </a:p>
+        </p:txBody>
+      </p:sp>
+    </p:spTree>
+  </p:cSld>
+  <p:clrMapOvr>
+    <a:masterClrMapping/>
+  </p:clrMapOvr>
+</p:sld>
+</file>
+
+<file path=ppt/slides/slide23.xml><?xml version="1.0" encoding="utf-8"?>
+<p:sld xmlns:a="http://schemas.openxmlformats.org/drawingml/2006/main" xmlns:r="http://schemas.openxmlformats.org/officeDocument/2006/relationships" xmlns:p="http://schemas.openxmlformats.org/presentationml/2006/main">
+  <p:cSld name="Slide 23">
+    <p:spTree>
+      <p:nvGrpSpPr>
+        <p:cNvPr id="1" name=""/>
+        <p:cNvGrpSpPr/>
+        <p:nvPr/>
+      </p:nvGrpSpPr>
+      <p:grpSpPr>
+        <a:xfrm>
+          <a:off x="0" y="0"/>
+          <a:ext cx="0" cy="0"/>
+          <a:chOff x="0" y="0"/>
+          <a:chExt cx="0" cy="0"/>
+        </a:xfrm>
+      </p:grpSpPr>
+      <p:sp>
+        <p:nvSpPr>
+          <p:cNvPr id="3" name="Text 1"/>
+          <p:cNvSpPr/>
+          <p:nvPr>
+            <p:ph idx="102" type="body" hasCustomPrompt="1"/>
+          </p:nvPr>
+        </p:nvSpPr>
+        <p:spPr>
+          <a:xfrm>
+            <a:off x="548640" y="347472"/>
+            <a:ext cx="11094415" cy="292608"/>
+          </a:xfrm>
+          <a:prstGeom prst="rect">
+            <a:avLst/>
+          </a:prstGeom>
+          <a:noFill/>
+          <a:ln/>
+        </p:spPr>
+        <p:txBody>
+          <a:bodyPr wrap="square" lIns="0" tIns="0" rIns="0" bIns="0" rtlCol="0"/>
+          <a:lstStyle/>
+          <a:p>
+            <a:pPr indent="0" marL="0">
+              <a:buNone/>
+            </a:pPr>
+            <a:r>
+              <a:rPr lang="en-US" sz="1200" b="1" spc="200" kern="0" dirty="0">
+                <a:solidFill>
+                  <a:schemeClr val="accent1"/>
+                </a:solidFill>
+              </a:rPr>
               <a:t>NEXT · CHAPTER 12</a:t>
             </a:r>
             <a:endParaRPr lang="en-US" sz="1200" dirty="0"/>
@@ -16678,7 +17749,7 @@
             <a:pPr algn="r"/>
             <a:fld id="{F7021451-1387-4CA6-816F-3879F97B5CBC}" type="slidenum">
               <a:rPr b="0" lang="en-US"/>
-              <a:t>22</a:t>
+              <a:t>23</a:t>
             </a:fld>
             <a:endParaRPr lang="en-US"/>
           </a:p>
@@ -17431,7 +18502,7 @@
                 <a:ea typeface="Cambria" pitchFamily="34" charset="-122"/>
                 <a:cs typeface="Cambria" pitchFamily="34" charset="-120"/>
               </a:rPr>
-              <a:t>Five sections, a worked example and a lab</a:t>
+              <a:t>Five sections, a worked example, a case and a lab</a:t>
             </a:r>
             <a:endParaRPr lang="en-US" sz="3200" dirty="0"/>
           </a:p>
@@ -18322,7 +19393,7 @@
                   <a:schemeClr val="accent1"/>
                 </a:solidFill>
               </a:rPr>
-              <a:t>AXIOM Lab 2.11</a:t>
+              <a:t>In Practice</a:t>
             </a:r>
             <a:endParaRPr lang="en-US" sz="1300" dirty="0"/>
           </a:p>
@@ -18361,7 +19432,7 @@
                 <a:ea typeface="Cambria" pitchFamily="34" charset="-122"/>
                 <a:cs typeface="Cambria" pitchFamily="34" charset="-120"/>
               </a:rPr>
-              <a:t>Which Law Do We Trust? Records, Families, and Balls</a:t>
+              <a:t>Seven States Plan for Four Colorado Rivers</a:t>
             </a:r>
             <a:endParaRPr lang="en-US" sz="1500" dirty="0"/>
           </a:p>
@@ -18376,6 +19447,144 @@
         <p:spPr>
           <a:xfrm>
             <a:off x="6415888" y="5660136"/>
+            <a:ext cx="2202104" cy="384048"/>
+          </a:xfrm>
+          <a:prstGeom prst="rect">
+            <a:avLst/>
+          </a:prstGeom>
+          <a:noFill/>
+          <a:ln/>
+        </p:spPr>
+        <p:txBody>
+          <a:bodyPr wrap="square" lIns="0" tIns="0" rIns="0" bIns="0" rtlCol="0" anchor="t"/>
+          <a:lstStyle/>
+          <a:p>
+            <a:pPr indent="0" marL="0">
+              <a:buNone/>
+            </a:pPr>
+            <a:r>
+              <a:rPr lang="en-US" sz="1300" dirty="0">
+                <a:solidFill>
+                  <a:schemeClr val="tx2"/>
+                </a:solidFill>
+              </a:rPr>
+              <a:t>At a Glance · board questions</a:t>
+            </a:r>
+            <a:endParaRPr lang="en-US" sz="1300" dirty="0"/>
+          </a:p>
+        </p:txBody>
+      </p:sp>
+      <p:sp>
+        <p:nvSpPr>
+          <p:cNvPr id="33" name="Card"/>
+          <p:cNvSpPr/>
+          <p:nvPr/>
+        </p:nvSpPr>
+        <p:spPr>
+          <a:xfrm>
+            <a:off x="9075191" y="4069080"/>
+            <a:ext cx="2567864" cy="2103120"/>
+          </a:xfrm>
+          <a:prstGeom prst="roundRect">
+            <a:avLst>
+              <a:gd name="adj" fmla="val 3478"/>
+            </a:avLst>
+          </a:prstGeom>
+          <a:solidFill>
+            <a:schemeClr val="bg2"/>
+          </a:solidFill>
+          <a:ln w="9525">
+            <a:solidFill>
+              <a:srgbClr val="C4CBD8"/>
+            </a:solidFill>
+            <a:prstDash val="solid"/>
+          </a:ln>
+        </p:spPr>
+      </p:sp>
+      <p:sp>
+        <p:nvSpPr>
+          <p:cNvPr id="34" name="Card label"/>
+          <p:cNvSpPr txBox="1"/>
+          <p:nvPr/>
+        </p:nvSpPr>
+        <p:spPr>
+          <a:xfrm>
+            <a:off x="9258071" y="4197096"/>
+            <a:ext cx="2202104" cy="310896"/>
+          </a:xfrm>
+          <a:prstGeom prst="rect">
+            <a:avLst/>
+          </a:prstGeom>
+          <a:noFill/>
+          <a:ln/>
+        </p:spPr>
+        <p:txBody>
+          <a:bodyPr wrap="square" lIns="0" tIns="0" rIns="0" bIns="0" rtlCol="0" anchor="ctr"/>
+          <a:lstStyle/>
+          <a:p>
+            <a:pPr indent="0" marL="0">
+              <a:buNone/>
+            </a:pPr>
+            <a:r>
+              <a:rPr lang="en-US" sz="1300" b="1" dirty="0">
+                <a:solidFill>
+                  <a:schemeClr val="accent1"/>
+                </a:solidFill>
+              </a:rPr>
+              <a:t>AXIOM Lab 2.11</a:t>
+            </a:r>
+            <a:endParaRPr lang="en-US" sz="1300" dirty="0"/>
+          </a:p>
+        </p:txBody>
+      </p:sp>
+      <p:sp>
+        <p:nvSpPr>
+          <p:cNvPr id="35" name="Card head"/>
+          <p:cNvSpPr txBox="1"/>
+          <p:nvPr/>
+        </p:nvSpPr>
+        <p:spPr>
+          <a:xfrm>
+            <a:off x="9258071" y="4526280"/>
+            <a:ext cx="2202104" cy="1060704"/>
+          </a:xfrm>
+          <a:prstGeom prst="rect">
+            <a:avLst/>
+          </a:prstGeom>
+          <a:noFill/>
+          <a:ln/>
+        </p:spPr>
+        <p:txBody>
+          <a:bodyPr wrap="square" lIns="0" tIns="0" rIns="0" bIns="0" rtlCol="0" anchor="t"/>
+          <a:lstStyle/>
+          <a:p>
+            <a:pPr indent="0" marL="0">
+              <a:buNone/>
+            </a:pPr>
+            <a:r>
+              <a:rPr lang="en-US" sz="1500" b="1" dirty="0">
+                <a:solidFill>
+                  <a:schemeClr val="tx1"/>
+                </a:solidFill>
+                <a:latin typeface="Cambria" pitchFamily="34" charset="0"/>
+                <a:ea typeface="Cambria" pitchFamily="34" charset="-122"/>
+                <a:cs typeface="Cambria" pitchFamily="34" charset="-120"/>
+              </a:rPr>
+              <a:t>Which Law Do We Trust? Records, Families, and Balls</a:t>
+            </a:r>
+            <a:endParaRPr lang="en-US" sz="1500" dirty="0"/>
+          </a:p>
+        </p:txBody>
+      </p:sp>
+      <p:sp>
+        <p:nvSpPr>
+          <p:cNvPr id="36" name="Card text"/>
+          <p:cNvSpPr txBox="1"/>
+          <p:nvPr/>
+        </p:nvSpPr>
+        <p:spPr>
+          <a:xfrm>
+            <a:off x="9258071" y="5660136"/>
             <a:ext cx="2202104" cy="384048"/>
           </a:xfrm>
           <a:prstGeom prst="rect">
